--- a/chrono_fair/presentation/CHRONO_Fair_supervisor_meeting.pptx
+++ b/chrono_fair/presentation/CHRONO_Fair_supervisor_meeting.pptx
@@ -1,36 +1,37 @@
 
 <file path=ppt/presentation.xml><?xml version="1.0" encoding="utf-8"?>
-<p:presentation xmlns:a="http://schemas.openxmlformats.org/drawingml/2006/main" xmlns:r="http://schemas.openxmlformats.org/officeDocument/2006/relationships" xmlns:p="http://schemas.openxmlformats.org/presentationml/2006/main" saveSubsetFonts="1" autoCompressPictures="0">
+<p:presentation xmlns:a="http://schemas.openxmlformats.org/drawingml/2006/main" xmlns:p="http://schemas.openxmlformats.org/presentationml/2006/main" xmlns:r="http://schemas.openxmlformats.org/officeDocument/2006/relationships" autoCompressPictures="0" saveSubsetFonts="1">
   <p:sldMasterIdLst>
     <p:sldMasterId id="2147483648" r:id="rId1"/>
   </p:sldMasterIdLst>
   <p:sldIdLst>
-    <p:sldId id="256" r:id="rId7"/>
-    <p:sldId id="257" r:id="rId8"/>
-    <p:sldId id="258" r:id="rId9"/>
-    <p:sldId id="259" r:id="rId10"/>
-    <p:sldId id="260" r:id="rId11"/>
-    <p:sldId id="261" r:id="rId12"/>
-    <p:sldId id="262" r:id="rId13"/>
-    <p:sldId id="263" r:id="rId14"/>
-    <p:sldId id="264" r:id="rId15"/>
-    <p:sldId id="265" r:id="rId16"/>
-    <p:sldId id="266" r:id="rId17"/>
-    <p:sldId id="267" r:id="rId18"/>
-    <p:sldId id="268" r:id="rId19"/>
-    <p:sldId id="269" r:id="rId20"/>
-    <p:sldId id="270" r:id="rId21"/>
-    <p:sldId id="271" r:id="rId22"/>
-    <p:sldId id="272" r:id="rId23"/>
+    <p:sldId id="256" r:id="rId2"/>
+    <p:sldId id="257" r:id="rId3"/>
+    <p:sldId id="258" r:id="rId4"/>
+    <p:sldId id="259" r:id="rId5"/>
+    <p:sldId id="260" r:id="rId6"/>
+    <p:sldId id="261" r:id="rId7"/>
+    <p:sldId id="262" r:id="rId8"/>
+    <p:sldId id="263" r:id="rId9"/>
+    <p:sldId id="264" r:id="rId10"/>
+    <p:sldId id="265" r:id="rId11"/>
+    <p:sldId id="266" r:id="rId12"/>
+    <p:sldId id="267" r:id="rId13"/>
+    <p:sldId id="268" r:id="rId14"/>
+    <p:sldId id="269" r:id="rId15"/>
+    <p:sldId id="270" r:id="rId16"/>
+    <p:sldId id="271" r:id="rId17"/>
+    <p:sldId id="272" r:id="rId18"/>
+    <p:sldId id="273" r:id="rId19"/>
   </p:sldIdLst>
-  <p:sldSz cx="12191695" cy="6858000" type="screen16x9"/>
+  <p:sldSz cx="12192000" cy="6858000" type="screen16x9"/>
   <p:notesSz cx="6858000" cy="9144000"/>
   <p:defaultTextStyle>
     <a:defPPr>
       <a:defRPr lang="en-US"/>
     </a:defPPr>
-    <a:lvl1pPr marL="0" algn="l" defTabSz="457200" rtl="0" eaLnBrk="1" latinLnBrk="0" hangingPunct="1">
-      <a:defRPr sz="1800" kern="1200">
+    <a:lvl1pPr algn="l" defTabSz="457200" eaLnBrk="1" hangingPunct="1" latinLnBrk="0" marL="0" rtl="0">
+      <a:defRPr kern="1200" sz="1800">
         <a:solidFill>
           <a:schemeClr val="tx1"/>
         </a:solidFill>
@@ -39,8 +40,8 @@
         <a:cs typeface="+mn-cs"/>
       </a:defRPr>
     </a:lvl1pPr>
-    <a:lvl2pPr marL="457200" algn="l" defTabSz="457200" rtl="0" eaLnBrk="1" latinLnBrk="0" hangingPunct="1">
-      <a:defRPr sz="1800" kern="1200">
+    <a:lvl2pPr algn="l" defTabSz="457200" eaLnBrk="1" hangingPunct="1" latinLnBrk="0" marL="457200" rtl="0">
+      <a:defRPr kern="1200" sz="1800">
         <a:solidFill>
           <a:schemeClr val="tx1"/>
         </a:solidFill>
@@ -49,8 +50,8 @@
         <a:cs typeface="+mn-cs"/>
       </a:defRPr>
     </a:lvl2pPr>
-    <a:lvl3pPr marL="914400" algn="l" defTabSz="457200" rtl="0" eaLnBrk="1" latinLnBrk="0" hangingPunct="1">
-      <a:defRPr sz="1800" kern="1200">
+    <a:lvl3pPr algn="l" defTabSz="457200" eaLnBrk="1" hangingPunct="1" latinLnBrk="0" marL="914400" rtl="0">
+      <a:defRPr kern="1200" sz="1800">
         <a:solidFill>
           <a:schemeClr val="tx1"/>
         </a:solidFill>
@@ -59,8 +60,8 @@
         <a:cs typeface="+mn-cs"/>
       </a:defRPr>
     </a:lvl3pPr>
-    <a:lvl4pPr marL="1371600" algn="l" defTabSz="457200" rtl="0" eaLnBrk="1" latinLnBrk="0" hangingPunct="1">
-      <a:defRPr sz="1800" kern="1200">
+    <a:lvl4pPr algn="l" defTabSz="457200" eaLnBrk="1" hangingPunct="1" latinLnBrk="0" marL="1371600" rtl="0">
+      <a:defRPr kern="1200" sz="1800">
         <a:solidFill>
           <a:schemeClr val="tx1"/>
         </a:solidFill>
@@ -69,8 +70,8 @@
         <a:cs typeface="+mn-cs"/>
       </a:defRPr>
     </a:lvl4pPr>
-    <a:lvl5pPr marL="1828800" algn="l" defTabSz="457200" rtl="0" eaLnBrk="1" latinLnBrk="0" hangingPunct="1">
-      <a:defRPr sz="1800" kern="1200">
+    <a:lvl5pPr algn="l" defTabSz="457200" eaLnBrk="1" hangingPunct="1" latinLnBrk="0" marL="1828800" rtl="0">
+      <a:defRPr kern="1200" sz="1800">
         <a:solidFill>
           <a:schemeClr val="tx1"/>
         </a:solidFill>
@@ -79,8 +80,8 @@
         <a:cs typeface="+mn-cs"/>
       </a:defRPr>
     </a:lvl5pPr>
-    <a:lvl6pPr marL="2286000" algn="l" defTabSz="457200" rtl="0" eaLnBrk="1" latinLnBrk="0" hangingPunct="1">
-      <a:defRPr sz="1800" kern="1200">
+    <a:lvl6pPr algn="l" defTabSz="457200" eaLnBrk="1" hangingPunct="1" latinLnBrk="0" marL="2286000" rtl="0">
+      <a:defRPr kern="1200" sz="1800">
         <a:solidFill>
           <a:schemeClr val="tx1"/>
         </a:solidFill>
@@ -89,8 +90,8 @@
         <a:cs typeface="+mn-cs"/>
       </a:defRPr>
     </a:lvl6pPr>
-    <a:lvl7pPr marL="2743200" algn="l" defTabSz="457200" rtl="0" eaLnBrk="1" latinLnBrk="0" hangingPunct="1">
-      <a:defRPr sz="1800" kern="1200">
+    <a:lvl7pPr algn="l" defTabSz="457200" eaLnBrk="1" hangingPunct="1" latinLnBrk="0" marL="2743200" rtl="0">
+      <a:defRPr kern="1200" sz="1800">
         <a:solidFill>
           <a:schemeClr val="tx1"/>
         </a:solidFill>
@@ -99,8 +100,8 @@
         <a:cs typeface="+mn-cs"/>
       </a:defRPr>
     </a:lvl7pPr>
-    <a:lvl8pPr marL="3200400" algn="l" defTabSz="457200" rtl="0" eaLnBrk="1" latinLnBrk="0" hangingPunct="1">
-      <a:defRPr sz="1800" kern="1200">
+    <a:lvl8pPr algn="l" defTabSz="457200" eaLnBrk="1" hangingPunct="1" latinLnBrk="0" marL="3200400" rtl="0">
+      <a:defRPr kern="1200" sz="1800">
         <a:solidFill>
           <a:schemeClr val="tx1"/>
         </a:solidFill>
@@ -109,8 +110,8 @@
         <a:cs typeface="+mn-cs"/>
       </a:defRPr>
     </a:lvl8pPr>
-    <a:lvl9pPr marL="3657600" algn="l" defTabSz="457200" rtl="0" eaLnBrk="1" latinLnBrk="0" hangingPunct="1">
-      <a:defRPr sz="1800" kern="1200">
+    <a:lvl9pPr algn="l" defTabSz="457200" eaLnBrk="1" hangingPunct="1" latinLnBrk="0" marL="3657600" rtl="0">
+      <a:defRPr kern="1200" sz="1800">
         <a:solidFill>
           <a:schemeClr val="tx1"/>
         </a:solidFill>
@@ -120,6 +121,22 @@
       </a:defRPr>
     </a:lvl9pPr>
   </p:defaultTextStyle>
+  <p:extLst>
+    <p:ext uri="{EFAFB233-063F-42B5-8137-9DF3F51BA10A}">
+      <p15:sldGuideLst xmlns:p15="http://schemas.microsoft.com/office/powerpoint/2012/main">
+        <p15:guide id="1" orient="horz" pos="1620" userDrawn="1">
+          <p15:clr>
+            <a:srgbClr val="A4A3A4"/>
+          </p15:clr>
+        </p15:guide>
+        <p15:guide id="2" pos="2880" userDrawn="1">
+          <p15:clr>
+            <a:srgbClr val="A4A3A4"/>
+          </p15:clr>
+        </p15:guide>
+      </p15:sldGuideLst>
+    </p:ext>
+  </p:extLst>
 </p:presentation>
 </file>
 
@@ -152,8 +169,8 @@
         </p:nvSpPr>
         <p:spPr>
           <a:xfrm>
-            <a:off x="685800" y="2130425"/>
-            <a:ext cx="7772400" cy="1470025"/>
+            <a:off x="685800" y="1597819"/>
+            <a:ext cx="7772400" cy="1102519"/>
           </a:xfrm>
         </p:spPr>
         <p:txBody>
@@ -161,10 +178,9 @@
           <a:lstStyle/>
           <a:p>
             <a:r>
-              <a:rPr lang="en-US" smtClean="0"/>
+              <a:rPr lang="en-US"/>
               <a:t>Click to edit Master title style</a:t>
             </a:r>
-            <a:endParaRPr lang="en-US"/>
           </a:p>
         </p:txBody>
       </p:sp>
@@ -180,8 +196,8 @@
         </p:nvSpPr>
         <p:spPr>
           <a:xfrm>
-            <a:off x="1371600" y="3886200"/>
-            <a:ext cx="6400800" cy="1752600"/>
+            <a:off x="1371600" y="2914650"/>
+            <a:ext cx="6400800" cy="1314450"/>
           </a:xfrm>
         </p:spPr>
         <p:txBody>
@@ -197,7 +213,7 @@
                 </a:solidFill>
               </a:defRPr>
             </a:lvl1pPr>
-            <a:lvl2pPr marL="457200" indent="0" algn="ctr">
+            <a:lvl2pPr marL="342900" indent="0" algn="ctr">
               <a:buNone/>
               <a:defRPr>
                 <a:solidFill>
@@ -207,7 +223,7 @@
                 </a:solidFill>
               </a:defRPr>
             </a:lvl2pPr>
-            <a:lvl3pPr marL="914400" indent="0" algn="ctr">
+            <a:lvl3pPr marL="685800" indent="0" algn="ctr">
               <a:buNone/>
               <a:defRPr>
                 <a:solidFill>
@@ -217,7 +233,7 @@
                 </a:solidFill>
               </a:defRPr>
             </a:lvl3pPr>
-            <a:lvl4pPr marL="1371600" indent="0" algn="ctr">
+            <a:lvl4pPr marL="1028700" indent="0" algn="ctr">
               <a:buNone/>
               <a:defRPr>
                 <a:solidFill>
@@ -227,7 +243,7 @@
                 </a:solidFill>
               </a:defRPr>
             </a:lvl4pPr>
-            <a:lvl5pPr marL="1828800" indent="0" algn="ctr">
+            <a:lvl5pPr marL="1371600" indent="0" algn="ctr">
               <a:buNone/>
               <a:defRPr>
                 <a:solidFill>
@@ -237,7 +253,7 @@
                 </a:solidFill>
               </a:defRPr>
             </a:lvl5pPr>
-            <a:lvl6pPr marL="2286000" indent="0" algn="ctr">
+            <a:lvl6pPr marL="1714500" indent="0" algn="ctr">
               <a:buNone/>
               <a:defRPr>
                 <a:solidFill>
@@ -247,7 +263,7 @@
                 </a:solidFill>
               </a:defRPr>
             </a:lvl6pPr>
-            <a:lvl7pPr marL="2743200" indent="0" algn="ctr">
+            <a:lvl7pPr marL="2057400" indent="0" algn="ctr">
               <a:buNone/>
               <a:defRPr>
                 <a:solidFill>
@@ -257,7 +273,7 @@
                 </a:solidFill>
               </a:defRPr>
             </a:lvl7pPr>
-            <a:lvl8pPr marL="3200400" indent="0" algn="ctr">
+            <a:lvl8pPr marL="2400300" indent="0" algn="ctr">
               <a:buNone/>
               <a:defRPr>
                 <a:solidFill>
@@ -267,7 +283,7 @@
                 </a:solidFill>
               </a:defRPr>
             </a:lvl8pPr>
-            <a:lvl9pPr marL="3657600" indent="0" algn="ctr">
+            <a:lvl9pPr marL="2743200" indent="0" algn="ctr">
               <a:buNone/>
               <a:defRPr>
                 <a:solidFill>
@@ -280,31 +296,30 @@
           </a:lstStyle>
           <a:p>
             <a:r>
+              <a:rPr lang="en-US"/>
+              <a:t>Click to edit Master subtitle style</a:t>
+            </a:r>
+          </a:p>
+        </p:txBody>
+      </p:sp>
+      <p:sp>
+        <p:nvSpPr>
+          <p:cNvPr id="4" name="Date Placeholder 3"/>
+          <p:cNvSpPr>
+            <a:spLocks noGrp="1"/>
+          </p:cNvSpPr>
+          <p:nvPr>
+            <p:ph type="dt" sz="half" idx="10"/>
+          </p:nvPr>
+        </p:nvSpPr>
+        <p:spPr/>
+        <p:txBody>
+          <a:bodyPr/>
+          <a:lstStyle/>
+          <a:p>
+            <a:fld id="{241EB5C9-1307-BA42-ABA2-0BC069CD8E7F}" type="datetimeFigureOut">
               <a:rPr lang="en-US" smtClean="0"/>
-              <a:t>Click to edit Master subtitle style</a:t>
-            </a:r>
-            <a:endParaRPr lang="en-US"/>
-          </a:p>
-        </p:txBody>
-      </p:sp>
-      <p:sp>
-        <p:nvSpPr>
-          <p:cNvPr id="4" name="Date Placeholder 3"/>
-          <p:cNvSpPr>
-            <a:spLocks noGrp="1"/>
-          </p:cNvSpPr>
-          <p:nvPr>
-            <p:ph type="dt" sz="half" idx="10"/>
-          </p:nvPr>
-        </p:nvSpPr>
-        <p:spPr/>
-        <p:txBody>
-          <a:bodyPr/>
-          <a:lstStyle/>
-          <a:p>
-            <a:fld id="{5BCAD085-E8A6-8845-BD4E-CB4CCA059FC4}" type="datetimeFigureOut">
-              <a:rPr lang="en-US" smtClean="0"/>
-              <a:t>1/27/13</a:t>
+              <a:t>1/2/22</a:t>
             </a:fld>
             <a:endParaRPr lang="en-US"/>
           </a:p>
@@ -344,7 +359,7 @@
           <a:bodyPr/>
           <a:lstStyle/>
           <a:p>
-            <a:fld id="{C1FF6DA9-008F-8B48-92A6-B652298478BF}" type="slidenum">
+            <a:fld id="{C5EF2332-01BF-834F-8236-50238282D533}" type="slidenum">
               <a:rPr lang="en-US" smtClean="0"/>
               <a:t>‹#›</a:t>
             </a:fld>
@@ -355,7 +370,7 @@
     </p:spTree>
     <p:extLst>
       <p:ext uri="{BB962C8B-B14F-4D97-AF65-F5344CB8AC3E}">
-        <p14:creationId xmlns:p14="http://schemas.microsoft.com/office/powerpoint/2010/main" val="3168075583"/>
+        <p14:creationId xmlns:p14="http://schemas.microsoft.com/office/powerpoint/2010/main" val="1444357513"/>
       </p:ext>
     </p:extLst>
   </p:cSld>
@@ -398,10 +413,9 @@
           <a:lstStyle/>
           <a:p>
             <a:r>
-              <a:rPr lang="en-US" smtClean="0"/>
+              <a:rPr lang="en-US"/>
               <a:t>Click to edit Master title style</a:t>
             </a:r>
-            <a:endParaRPr lang="en-US"/>
           </a:p>
         </p:txBody>
       </p:sp>
@@ -422,59 +436,58 @@
           <a:p>
             <a:pPr lvl="0"/>
             <a:r>
+              <a:rPr lang="en-US"/>
+              <a:t>Click to edit Master text styles</a:t>
+            </a:r>
+          </a:p>
+          <a:p>
+            <a:pPr lvl="1"/>
+            <a:r>
+              <a:rPr lang="en-US"/>
+              <a:t>Second level</a:t>
+            </a:r>
+          </a:p>
+          <a:p>
+            <a:pPr lvl="2"/>
+            <a:r>
+              <a:rPr lang="en-US"/>
+              <a:t>Third level</a:t>
+            </a:r>
+          </a:p>
+          <a:p>
+            <a:pPr lvl="3"/>
+            <a:r>
+              <a:rPr lang="en-US"/>
+              <a:t>Fourth level</a:t>
+            </a:r>
+          </a:p>
+          <a:p>
+            <a:pPr lvl="4"/>
+            <a:r>
+              <a:rPr lang="en-US"/>
+              <a:t>Fifth level</a:t>
+            </a:r>
+          </a:p>
+        </p:txBody>
+      </p:sp>
+      <p:sp>
+        <p:nvSpPr>
+          <p:cNvPr id="4" name="Date Placeholder 3"/>
+          <p:cNvSpPr>
+            <a:spLocks noGrp="1"/>
+          </p:cNvSpPr>
+          <p:nvPr>
+            <p:ph type="dt" sz="half" idx="10"/>
+          </p:nvPr>
+        </p:nvSpPr>
+        <p:spPr/>
+        <p:txBody>
+          <a:bodyPr/>
+          <a:lstStyle/>
+          <a:p>
+            <a:fld id="{241EB5C9-1307-BA42-ABA2-0BC069CD8E7F}" type="datetimeFigureOut">
               <a:rPr lang="en-US" smtClean="0"/>
-              <a:t>Click to edit Master text styles</a:t>
-            </a:r>
-          </a:p>
-          <a:p>
-            <a:pPr lvl="1"/>
-            <a:r>
-              <a:rPr lang="en-US" smtClean="0"/>
-              <a:t>Second level</a:t>
-            </a:r>
-          </a:p>
-          <a:p>
-            <a:pPr lvl="2"/>
-            <a:r>
-              <a:rPr lang="en-US" smtClean="0"/>
-              <a:t>Third level</a:t>
-            </a:r>
-          </a:p>
-          <a:p>
-            <a:pPr lvl="3"/>
-            <a:r>
-              <a:rPr lang="en-US" smtClean="0"/>
-              <a:t>Fourth level</a:t>
-            </a:r>
-          </a:p>
-          <a:p>
-            <a:pPr lvl="4"/>
-            <a:r>
-              <a:rPr lang="en-US" smtClean="0"/>
-              <a:t>Fifth level</a:t>
-            </a:r>
-            <a:endParaRPr lang="en-US"/>
-          </a:p>
-        </p:txBody>
-      </p:sp>
-      <p:sp>
-        <p:nvSpPr>
-          <p:cNvPr id="4" name="Date Placeholder 3"/>
-          <p:cNvSpPr>
-            <a:spLocks noGrp="1"/>
-          </p:cNvSpPr>
-          <p:nvPr>
-            <p:ph type="dt" sz="half" idx="10"/>
-          </p:nvPr>
-        </p:nvSpPr>
-        <p:spPr/>
-        <p:txBody>
-          <a:bodyPr/>
-          <a:lstStyle/>
-          <a:p>
-            <a:fld id="{5BCAD085-E8A6-8845-BD4E-CB4CCA059FC4}" type="datetimeFigureOut">
-              <a:rPr lang="en-US" smtClean="0"/>
-              <a:t>1/27/13</a:t>
+              <a:t>1/2/22</a:t>
             </a:fld>
             <a:endParaRPr lang="en-US"/>
           </a:p>
@@ -514,7 +527,7 @@
           <a:bodyPr/>
           <a:lstStyle/>
           <a:p>
-            <a:fld id="{C1FF6DA9-008F-8B48-92A6-B652298478BF}" type="slidenum">
+            <a:fld id="{C5EF2332-01BF-834F-8236-50238282D533}" type="slidenum">
               <a:rPr lang="en-US" smtClean="0"/>
               <a:t>‹#›</a:t>
             </a:fld>
@@ -525,7 +538,7 @@
     </p:spTree>
     <p:extLst>
       <p:ext uri="{BB962C8B-B14F-4D97-AF65-F5344CB8AC3E}">
-        <p14:creationId xmlns:p14="http://schemas.microsoft.com/office/powerpoint/2010/main" val="2910927964"/>
+        <p14:creationId xmlns:p14="http://schemas.microsoft.com/office/powerpoint/2010/main" val="313914798"/>
       </p:ext>
     </p:extLst>
   </p:cSld>
@@ -564,8 +577,8 @@
         </p:nvSpPr>
         <p:spPr>
           <a:xfrm>
-            <a:off x="6629400" y="274638"/>
-            <a:ext cx="2057400" cy="5851525"/>
+            <a:off x="6629400" y="205979"/>
+            <a:ext cx="2057400" cy="4388644"/>
           </a:xfrm>
         </p:spPr>
         <p:txBody>
@@ -573,10 +586,9 @@
           <a:lstStyle/>
           <a:p>
             <a:r>
-              <a:rPr lang="en-US" smtClean="0"/>
+              <a:rPr lang="en-US"/>
               <a:t>Click to edit Master title style</a:t>
             </a:r>
-            <a:endParaRPr lang="en-US"/>
           </a:p>
         </p:txBody>
       </p:sp>
@@ -592,8 +604,8 @@
         </p:nvSpPr>
         <p:spPr>
           <a:xfrm>
-            <a:off x="457200" y="274638"/>
-            <a:ext cx="6019800" cy="5851525"/>
+            <a:off x="457200" y="205979"/>
+            <a:ext cx="6019800" cy="4388644"/>
           </a:xfrm>
         </p:spPr>
         <p:txBody>
@@ -602,59 +614,58 @@
           <a:p>
             <a:pPr lvl="0"/>
             <a:r>
+              <a:rPr lang="en-US"/>
+              <a:t>Click to edit Master text styles</a:t>
+            </a:r>
+          </a:p>
+          <a:p>
+            <a:pPr lvl="1"/>
+            <a:r>
+              <a:rPr lang="en-US"/>
+              <a:t>Second level</a:t>
+            </a:r>
+          </a:p>
+          <a:p>
+            <a:pPr lvl="2"/>
+            <a:r>
+              <a:rPr lang="en-US"/>
+              <a:t>Third level</a:t>
+            </a:r>
+          </a:p>
+          <a:p>
+            <a:pPr lvl="3"/>
+            <a:r>
+              <a:rPr lang="en-US"/>
+              <a:t>Fourth level</a:t>
+            </a:r>
+          </a:p>
+          <a:p>
+            <a:pPr lvl="4"/>
+            <a:r>
+              <a:rPr lang="en-US"/>
+              <a:t>Fifth level</a:t>
+            </a:r>
+          </a:p>
+        </p:txBody>
+      </p:sp>
+      <p:sp>
+        <p:nvSpPr>
+          <p:cNvPr id="4" name="Date Placeholder 3"/>
+          <p:cNvSpPr>
+            <a:spLocks noGrp="1"/>
+          </p:cNvSpPr>
+          <p:nvPr>
+            <p:ph type="dt" sz="half" idx="10"/>
+          </p:nvPr>
+        </p:nvSpPr>
+        <p:spPr/>
+        <p:txBody>
+          <a:bodyPr/>
+          <a:lstStyle/>
+          <a:p>
+            <a:fld id="{241EB5C9-1307-BA42-ABA2-0BC069CD8E7F}" type="datetimeFigureOut">
               <a:rPr lang="en-US" smtClean="0"/>
-              <a:t>Click to edit Master text styles</a:t>
-            </a:r>
-          </a:p>
-          <a:p>
-            <a:pPr lvl="1"/>
-            <a:r>
-              <a:rPr lang="en-US" smtClean="0"/>
-              <a:t>Second level</a:t>
-            </a:r>
-          </a:p>
-          <a:p>
-            <a:pPr lvl="2"/>
-            <a:r>
-              <a:rPr lang="en-US" smtClean="0"/>
-              <a:t>Third level</a:t>
-            </a:r>
-          </a:p>
-          <a:p>
-            <a:pPr lvl="3"/>
-            <a:r>
-              <a:rPr lang="en-US" smtClean="0"/>
-              <a:t>Fourth level</a:t>
-            </a:r>
-          </a:p>
-          <a:p>
-            <a:pPr lvl="4"/>
-            <a:r>
-              <a:rPr lang="en-US" smtClean="0"/>
-              <a:t>Fifth level</a:t>
-            </a:r>
-            <a:endParaRPr lang="en-US"/>
-          </a:p>
-        </p:txBody>
-      </p:sp>
-      <p:sp>
-        <p:nvSpPr>
-          <p:cNvPr id="4" name="Date Placeholder 3"/>
-          <p:cNvSpPr>
-            <a:spLocks noGrp="1"/>
-          </p:cNvSpPr>
-          <p:nvPr>
-            <p:ph type="dt" sz="half" idx="10"/>
-          </p:nvPr>
-        </p:nvSpPr>
-        <p:spPr/>
-        <p:txBody>
-          <a:bodyPr/>
-          <a:lstStyle/>
-          <a:p>
-            <a:fld id="{5BCAD085-E8A6-8845-BD4E-CB4CCA059FC4}" type="datetimeFigureOut">
-              <a:rPr lang="en-US" smtClean="0"/>
-              <a:t>1/27/13</a:t>
+              <a:t>1/2/22</a:t>
             </a:fld>
             <a:endParaRPr lang="en-US"/>
           </a:p>
@@ -694,7 +705,7 @@
           <a:bodyPr/>
           <a:lstStyle/>
           <a:p>
-            <a:fld id="{C1FF6DA9-008F-8B48-92A6-B652298478BF}" type="slidenum">
+            <a:fld id="{C5EF2332-01BF-834F-8236-50238282D533}" type="slidenum">
               <a:rPr lang="en-US" smtClean="0"/>
               <a:t>‹#›</a:t>
             </a:fld>
@@ -705,7 +716,7 @@
     </p:spTree>
     <p:extLst>
       <p:ext uri="{BB962C8B-B14F-4D97-AF65-F5344CB8AC3E}">
-        <p14:creationId xmlns:p14="http://schemas.microsoft.com/office/powerpoint/2010/main" val="3612223792"/>
+        <p14:creationId xmlns:p14="http://schemas.microsoft.com/office/powerpoint/2010/main" val="2581529045"/>
       </p:ext>
     </p:extLst>
   </p:cSld>
@@ -748,83 +759,81 @@
           <a:lstStyle/>
           <a:p>
             <a:r>
+              <a:rPr lang="en-US"/>
+              <a:t>Click to edit Master title style</a:t>
+            </a:r>
+          </a:p>
+        </p:txBody>
+      </p:sp>
+      <p:sp>
+        <p:nvSpPr>
+          <p:cNvPr id="3" name="Content Placeholder 2"/>
+          <p:cNvSpPr>
+            <a:spLocks noGrp="1"/>
+          </p:cNvSpPr>
+          <p:nvPr>
+            <p:ph idx="1"/>
+          </p:nvPr>
+        </p:nvSpPr>
+        <p:spPr/>
+        <p:txBody>
+          <a:bodyPr/>
+          <a:lstStyle/>
+          <a:p>
+            <a:pPr lvl="0"/>
+            <a:r>
+              <a:rPr lang="en-US"/>
+              <a:t>Click to edit Master text styles</a:t>
+            </a:r>
+          </a:p>
+          <a:p>
+            <a:pPr lvl="1"/>
+            <a:r>
+              <a:rPr lang="en-US"/>
+              <a:t>Second level</a:t>
+            </a:r>
+          </a:p>
+          <a:p>
+            <a:pPr lvl="2"/>
+            <a:r>
+              <a:rPr lang="en-US"/>
+              <a:t>Third level</a:t>
+            </a:r>
+          </a:p>
+          <a:p>
+            <a:pPr lvl="3"/>
+            <a:r>
+              <a:rPr lang="en-US"/>
+              <a:t>Fourth level</a:t>
+            </a:r>
+          </a:p>
+          <a:p>
+            <a:pPr lvl="4"/>
+            <a:r>
+              <a:rPr lang="en-US"/>
+              <a:t>Fifth level</a:t>
+            </a:r>
+          </a:p>
+        </p:txBody>
+      </p:sp>
+      <p:sp>
+        <p:nvSpPr>
+          <p:cNvPr id="4" name="Date Placeholder 3"/>
+          <p:cNvSpPr>
+            <a:spLocks noGrp="1"/>
+          </p:cNvSpPr>
+          <p:nvPr>
+            <p:ph type="dt" sz="half" idx="10"/>
+          </p:nvPr>
+        </p:nvSpPr>
+        <p:spPr/>
+        <p:txBody>
+          <a:bodyPr/>
+          <a:lstStyle/>
+          <a:p>
+            <a:fld id="{241EB5C9-1307-BA42-ABA2-0BC069CD8E7F}" type="datetimeFigureOut">
               <a:rPr lang="en-US" smtClean="0"/>
-              <a:t>Click to edit Master title style</a:t>
-            </a:r>
-            <a:endParaRPr lang="en-US"/>
-          </a:p>
-        </p:txBody>
-      </p:sp>
-      <p:sp>
-        <p:nvSpPr>
-          <p:cNvPr id="3" name="Content Placeholder 2"/>
-          <p:cNvSpPr>
-            <a:spLocks noGrp="1"/>
-          </p:cNvSpPr>
-          <p:nvPr>
-            <p:ph idx="1"/>
-          </p:nvPr>
-        </p:nvSpPr>
-        <p:spPr/>
-        <p:txBody>
-          <a:bodyPr/>
-          <a:lstStyle/>
-          <a:p>
-            <a:pPr lvl="0"/>
-            <a:r>
-              <a:rPr lang="en-US" smtClean="0"/>
-              <a:t>Click to edit Master text styles</a:t>
-            </a:r>
-          </a:p>
-          <a:p>
-            <a:pPr lvl="1"/>
-            <a:r>
-              <a:rPr lang="en-US" smtClean="0"/>
-              <a:t>Second level</a:t>
-            </a:r>
-          </a:p>
-          <a:p>
-            <a:pPr lvl="2"/>
-            <a:r>
-              <a:rPr lang="en-US" smtClean="0"/>
-              <a:t>Third level</a:t>
-            </a:r>
-          </a:p>
-          <a:p>
-            <a:pPr lvl="3"/>
-            <a:r>
-              <a:rPr lang="en-US" smtClean="0"/>
-              <a:t>Fourth level</a:t>
-            </a:r>
-          </a:p>
-          <a:p>
-            <a:pPr lvl="4"/>
-            <a:r>
-              <a:rPr lang="en-US" smtClean="0"/>
-              <a:t>Fifth level</a:t>
-            </a:r>
-            <a:endParaRPr lang="en-US"/>
-          </a:p>
-        </p:txBody>
-      </p:sp>
-      <p:sp>
-        <p:nvSpPr>
-          <p:cNvPr id="4" name="Date Placeholder 3"/>
-          <p:cNvSpPr>
-            <a:spLocks noGrp="1"/>
-          </p:cNvSpPr>
-          <p:nvPr>
-            <p:ph type="dt" sz="half" idx="10"/>
-          </p:nvPr>
-        </p:nvSpPr>
-        <p:spPr/>
-        <p:txBody>
-          <a:bodyPr/>
-          <a:lstStyle/>
-          <a:p>
-            <a:fld id="{5BCAD085-E8A6-8845-BD4E-CB4CCA059FC4}" type="datetimeFigureOut">
-              <a:rPr lang="en-US" smtClean="0"/>
-              <a:t>1/27/13</a:t>
+              <a:t>1/2/22</a:t>
             </a:fld>
             <a:endParaRPr lang="en-US"/>
           </a:p>
@@ -864,7 +873,7 @@
           <a:bodyPr/>
           <a:lstStyle/>
           <a:p>
-            <a:fld id="{C1FF6DA9-008F-8B48-92A6-B652298478BF}" type="slidenum">
+            <a:fld id="{C5EF2332-01BF-834F-8236-50238282D533}" type="slidenum">
               <a:rPr lang="en-US" smtClean="0"/>
               <a:t>‹#›</a:t>
             </a:fld>
@@ -875,7 +884,7 @@
     </p:spTree>
     <p:extLst>
       <p:ext uri="{BB962C8B-B14F-4D97-AF65-F5344CB8AC3E}">
-        <p14:creationId xmlns:p14="http://schemas.microsoft.com/office/powerpoint/2010/main" val="2614314258"/>
+        <p14:creationId xmlns:p14="http://schemas.microsoft.com/office/powerpoint/2010/main" val="338346009"/>
       </p:ext>
     </p:extLst>
   </p:cSld>
@@ -914,23 +923,22 @@
         </p:nvSpPr>
         <p:spPr>
           <a:xfrm>
-            <a:off x="722313" y="4406900"/>
-            <a:ext cx="7772400" cy="1362075"/>
+            <a:off x="722313" y="3305176"/>
+            <a:ext cx="7772400" cy="1021556"/>
           </a:xfrm>
         </p:spPr>
         <p:txBody>
           <a:bodyPr anchor="t"/>
           <a:lstStyle>
             <a:lvl1pPr algn="l">
-              <a:defRPr sz="4000" b="1" cap="all"/>
+              <a:defRPr sz="3000" b="1" cap="all"/>
             </a:lvl1pPr>
           </a:lstStyle>
           <a:p>
             <a:r>
-              <a:rPr lang="en-US" smtClean="0"/>
+              <a:rPr lang="en-US"/>
               <a:t>Click to edit Master title style</a:t>
             </a:r>
-            <a:endParaRPr lang="en-US"/>
           </a:p>
         </p:txBody>
       </p:sp>
@@ -946,8 +954,8 @@
         </p:nvSpPr>
         <p:spPr>
           <a:xfrm>
-            <a:off x="722313" y="2906713"/>
-            <a:ext cx="7772400" cy="1500187"/>
+            <a:off x="722313" y="2180035"/>
+            <a:ext cx="7772400" cy="1125140"/>
           </a:xfrm>
         </p:spPr>
         <p:txBody>
@@ -955,7 +963,7 @@
           <a:lstStyle>
             <a:lvl1pPr marL="0" indent="0">
               <a:buNone/>
-              <a:defRPr sz="2000">
+              <a:defRPr sz="1500">
                 <a:solidFill>
                   <a:schemeClr val="tx1">
                     <a:tint val="75000"/>
@@ -963,9 +971,9 @@
                 </a:solidFill>
               </a:defRPr>
             </a:lvl1pPr>
-            <a:lvl2pPr marL="457200" indent="0">
-              <a:buNone/>
-              <a:defRPr sz="1800">
+            <a:lvl2pPr marL="342900" indent="0">
+              <a:buNone/>
+              <a:defRPr sz="1350">
                 <a:solidFill>
                   <a:schemeClr val="tx1">
                     <a:tint val="75000"/>
@@ -973,9 +981,9 @@
                 </a:solidFill>
               </a:defRPr>
             </a:lvl2pPr>
-            <a:lvl3pPr marL="914400" indent="0">
-              <a:buNone/>
-              <a:defRPr sz="1600">
+            <a:lvl3pPr marL="685800" indent="0">
+              <a:buNone/>
+              <a:defRPr sz="1200">
                 <a:solidFill>
                   <a:schemeClr val="tx1">
                     <a:tint val="75000"/>
@@ -983,9 +991,9 @@
                 </a:solidFill>
               </a:defRPr>
             </a:lvl3pPr>
-            <a:lvl4pPr marL="1371600" indent="0">
-              <a:buNone/>
-              <a:defRPr sz="1400">
+            <a:lvl4pPr marL="1028700" indent="0">
+              <a:buNone/>
+              <a:defRPr sz="1050">
                 <a:solidFill>
                   <a:schemeClr val="tx1">
                     <a:tint val="75000"/>
@@ -993,9 +1001,9 @@
                 </a:solidFill>
               </a:defRPr>
             </a:lvl4pPr>
-            <a:lvl5pPr marL="1828800" indent="0">
-              <a:buNone/>
-              <a:defRPr sz="1400">
+            <a:lvl5pPr marL="1371600" indent="0">
+              <a:buNone/>
+              <a:defRPr sz="1050">
                 <a:solidFill>
                   <a:schemeClr val="tx1">
                     <a:tint val="75000"/>
@@ -1003,9 +1011,9 @@
                 </a:solidFill>
               </a:defRPr>
             </a:lvl5pPr>
-            <a:lvl6pPr marL="2286000" indent="0">
-              <a:buNone/>
-              <a:defRPr sz="1400">
+            <a:lvl6pPr marL="1714500" indent="0">
+              <a:buNone/>
+              <a:defRPr sz="1050">
                 <a:solidFill>
                   <a:schemeClr val="tx1">
                     <a:tint val="75000"/>
@@ -1013,9 +1021,9 @@
                 </a:solidFill>
               </a:defRPr>
             </a:lvl6pPr>
-            <a:lvl7pPr marL="2743200" indent="0">
-              <a:buNone/>
-              <a:defRPr sz="1400">
+            <a:lvl7pPr marL="2057400" indent="0">
+              <a:buNone/>
+              <a:defRPr sz="1050">
                 <a:solidFill>
                   <a:schemeClr val="tx1">
                     <a:tint val="75000"/>
@@ -1023,9 +1031,9 @@
                 </a:solidFill>
               </a:defRPr>
             </a:lvl7pPr>
-            <a:lvl8pPr marL="3200400" indent="0">
-              <a:buNone/>
-              <a:defRPr sz="1400">
+            <a:lvl8pPr marL="2400300" indent="0">
+              <a:buNone/>
+              <a:defRPr sz="1050">
                 <a:solidFill>
                   <a:schemeClr val="tx1">
                     <a:tint val="75000"/>
@@ -1033,9 +1041,9 @@
                 </a:solidFill>
               </a:defRPr>
             </a:lvl8pPr>
-            <a:lvl9pPr marL="3657600" indent="0">
-              <a:buNone/>
-              <a:defRPr sz="1400">
+            <a:lvl9pPr marL="2743200" indent="0">
+              <a:buNone/>
+              <a:defRPr sz="1050">
                 <a:solidFill>
                   <a:schemeClr val="tx1">
                     <a:tint val="75000"/>
@@ -1047,30 +1055,30 @@
           <a:p>
             <a:pPr lvl="0"/>
             <a:r>
+              <a:rPr lang="en-US"/>
+              <a:t>Click to edit Master text styles</a:t>
+            </a:r>
+          </a:p>
+        </p:txBody>
+      </p:sp>
+      <p:sp>
+        <p:nvSpPr>
+          <p:cNvPr id="4" name="Date Placeholder 3"/>
+          <p:cNvSpPr>
+            <a:spLocks noGrp="1"/>
+          </p:cNvSpPr>
+          <p:nvPr>
+            <p:ph type="dt" sz="half" idx="10"/>
+          </p:nvPr>
+        </p:nvSpPr>
+        <p:spPr/>
+        <p:txBody>
+          <a:bodyPr/>
+          <a:lstStyle/>
+          <a:p>
+            <a:fld id="{241EB5C9-1307-BA42-ABA2-0BC069CD8E7F}" type="datetimeFigureOut">
               <a:rPr lang="en-US" smtClean="0"/>
-              <a:t>Click to edit Master text styles</a:t>
-            </a:r>
-          </a:p>
-        </p:txBody>
-      </p:sp>
-      <p:sp>
-        <p:nvSpPr>
-          <p:cNvPr id="4" name="Date Placeholder 3"/>
-          <p:cNvSpPr>
-            <a:spLocks noGrp="1"/>
-          </p:cNvSpPr>
-          <p:nvPr>
-            <p:ph type="dt" sz="half" idx="10"/>
-          </p:nvPr>
-        </p:nvSpPr>
-        <p:spPr/>
-        <p:txBody>
-          <a:bodyPr/>
-          <a:lstStyle/>
-          <a:p>
-            <a:fld id="{5BCAD085-E8A6-8845-BD4E-CB4CCA059FC4}" type="datetimeFigureOut">
-              <a:rPr lang="en-US" smtClean="0"/>
-              <a:t>1/27/13</a:t>
+              <a:t>1/2/22</a:t>
             </a:fld>
             <a:endParaRPr lang="en-US"/>
           </a:p>
@@ -1110,7 +1118,7 @@
           <a:bodyPr/>
           <a:lstStyle/>
           <a:p>
-            <a:fld id="{C1FF6DA9-008F-8B48-92A6-B652298478BF}" type="slidenum">
+            <a:fld id="{C5EF2332-01BF-834F-8236-50238282D533}" type="slidenum">
               <a:rPr lang="en-US" smtClean="0"/>
               <a:t>‹#›</a:t>
             </a:fld>
@@ -1121,7 +1129,7 @@
     </p:spTree>
     <p:extLst>
       <p:ext uri="{BB962C8B-B14F-4D97-AF65-F5344CB8AC3E}">
-        <p14:creationId xmlns:p14="http://schemas.microsoft.com/office/powerpoint/2010/main" val="960648375"/>
+        <p14:creationId xmlns:p14="http://schemas.microsoft.com/office/powerpoint/2010/main" val="1073069076"/>
       </p:ext>
     </p:extLst>
   </p:cSld>
@@ -1164,10 +1172,9 @@
           <a:lstStyle/>
           <a:p>
             <a:r>
-              <a:rPr lang="en-US" smtClean="0"/>
+              <a:rPr lang="en-US"/>
               <a:t>Click to edit Master title style</a:t>
             </a:r>
-            <a:endParaRPr lang="en-US"/>
           </a:p>
         </p:txBody>
       </p:sp>
@@ -1183,76 +1190,75 @@
         </p:nvSpPr>
         <p:spPr>
           <a:xfrm>
-            <a:off x="457200" y="1600200"/>
-            <a:ext cx="4038600" cy="4525963"/>
+            <a:off x="457200" y="1200151"/>
+            <a:ext cx="4038600" cy="3394472"/>
           </a:xfrm>
         </p:spPr>
         <p:txBody>
           <a:bodyPr/>
           <a:lstStyle>
             <a:lvl1pPr>
-              <a:defRPr sz="2800"/>
+              <a:defRPr sz="2100"/>
             </a:lvl1pPr>
             <a:lvl2pPr>
-              <a:defRPr sz="2400"/>
+              <a:defRPr sz="1800"/>
             </a:lvl2pPr>
             <a:lvl3pPr>
-              <a:defRPr sz="2000"/>
+              <a:defRPr sz="1500"/>
             </a:lvl3pPr>
             <a:lvl4pPr>
-              <a:defRPr sz="1800"/>
+              <a:defRPr sz="1350"/>
             </a:lvl4pPr>
             <a:lvl5pPr>
-              <a:defRPr sz="1800"/>
+              <a:defRPr sz="1350"/>
             </a:lvl5pPr>
             <a:lvl6pPr>
-              <a:defRPr sz="1800"/>
+              <a:defRPr sz="1350"/>
             </a:lvl6pPr>
             <a:lvl7pPr>
-              <a:defRPr sz="1800"/>
+              <a:defRPr sz="1350"/>
             </a:lvl7pPr>
             <a:lvl8pPr>
-              <a:defRPr sz="1800"/>
+              <a:defRPr sz="1350"/>
             </a:lvl8pPr>
             <a:lvl9pPr>
-              <a:defRPr sz="1800"/>
+              <a:defRPr sz="1350"/>
             </a:lvl9pPr>
           </a:lstStyle>
           <a:p>
             <a:pPr lvl="0"/>
             <a:r>
-              <a:rPr lang="en-US" smtClean="0"/>
+              <a:rPr lang="en-US"/>
               <a:t>Click to edit Master text styles</a:t>
             </a:r>
           </a:p>
           <a:p>
             <a:pPr lvl="1"/>
             <a:r>
-              <a:rPr lang="en-US" smtClean="0"/>
+              <a:rPr lang="en-US"/>
               <a:t>Second level</a:t>
             </a:r>
           </a:p>
           <a:p>
             <a:pPr lvl="2"/>
             <a:r>
-              <a:rPr lang="en-US" smtClean="0"/>
+              <a:rPr lang="en-US"/>
               <a:t>Third level</a:t>
             </a:r>
           </a:p>
           <a:p>
             <a:pPr lvl="3"/>
             <a:r>
-              <a:rPr lang="en-US" smtClean="0"/>
+              <a:rPr lang="en-US"/>
               <a:t>Fourth level</a:t>
             </a:r>
           </a:p>
           <a:p>
             <a:pPr lvl="4"/>
             <a:r>
-              <a:rPr lang="en-US" smtClean="0"/>
+              <a:rPr lang="en-US"/>
               <a:t>Fifth level</a:t>
             </a:r>
-            <a:endParaRPr lang="en-US"/>
           </a:p>
         </p:txBody>
       </p:sp>
@@ -1268,97 +1274,96 @@
         </p:nvSpPr>
         <p:spPr>
           <a:xfrm>
-            <a:off x="4648200" y="1600200"/>
-            <a:ext cx="4038600" cy="4525963"/>
+            <a:off x="4648200" y="1200151"/>
+            <a:ext cx="4038600" cy="3394472"/>
           </a:xfrm>
         </p:spPr>
         <p:txBody>
           <a:bodyPr/>
           <a:lstStyle>
             <a:lvl1pPr>
-              <a:defRPr sz="2800"/>
+              <a:defRPr sz="2100"/>
             </a:lvl1pPr>
             <a:lvl2pPr>
-              <a:defRPr sz="2400"/>
+              <a:defRPr sz="1800"/>
             </a:lvl2pPr>
             <a:lvl3pPr>
-              <a:defRPr sz="2000"/>
+              <a:defRPr sz="1500"/>
             </a:lvl3pPr>
             <a:lvl4pPr>
-              <a:defRPr sz="1800"/>
+              <a:defRPr sz="1350"/>
             </a:lvl4pPr>
             <a:lvl5pPr>
-              <a:defRPr sz="1800"/>
+              <a:defRPr sz="1350"/>
             </a:lvl5pPr>
             <a:lvl6pPr>
-              <a:defRPr sz="1800"/>
+              <a:defRPr sz="1350"/>
             </a:lvl6pPr>
             <a:lvl7pPr>
-              <a:defRPr sz="1800"/>
+              <a:defRPr sz="1350"/>
             </a:lvl7pPr>
             <a:lvl8pPr>
-              <a:defRPr sz="1800"/>
+              <a:defRPr sz="1350"/>
             </a:lvl8pPr>
             <a:lvl9pPr>
-              <a:defRPr sz="1800"/>
+              <a:defRPr sz="1350"/>
             </a:lvl9pPr>
           </a:lstStyle>
           <a:p>
             <a:pPr lvl="0"/>
             <a:r>
+              <a:rPr lang="en-US"/>
+              <a:t>Click to edit Master text styles</a:t>
+            </a:r>
+          </a:p>
+          <a:p>
+            <a:pPr lvl="1"/>
+            <a:r>
+              <a:rPr lang="en-US"/>
+              <a:t>Second level</a:t>
+            </a:r>
+          </a:p>
+          <a:p>
+            <a:pPr lvl="2"/>
+            <a:r>
+              <a:rPr lang="en-US"/>
+              <a:t>Third level</a:t>
+            </a:r>
+          </a:p>
+          <a:p>
+            <a:pPr lvl="3"/>
+            <a:r>
+              <a:rPr lang="en-US"/>
+              <a:t>Fourth level</a:t>
+            </a:r>
+          </a:p>
+          <a:p>
+            <a:pPr lvl="4"/>
+            <a:r>
+              <a:rPr lang="en-US"/>
+              <a:t>Fifth level</a:t>
+            </a:r>
+          </a:p>
+        </p:txBody>
+      </p:sp>
+      <p:sp>
+        <p:nvSpPr>
+          <p:cNvPr id="5" name="Date Placeholder 4"/>
+          <p:cNvSpPr>
+            <a:spLocks noGrp="1"/>
+          </p:cNvSpPr>
+          <p:nvPr>
+            <p:ph type="dt" sz="half" idx="10"/>
+          </p:nvPr>
+        </p:nvSpPr>
+        <p:spPr/>
+        <p:txBody>
+          <a:bodyPr/>
+          <a:lstStyle/>
+          <a:p>
+            <a:fld id="{241EB5C9-1307-BA42-ABA2-0BC069CD8E7F}" type="datetimeFigureOut">
               <a:rPr lang="en-US" smtClean="0"/>
-              <a:t>Click to edit Master text styles</a:t>
-            </a:r>
-          </a:p>
-          <a:p>
-            <a:pPr lvl="1"/>
-            <a:r>
-              <a:rPr lang="en-US" smtClean="0"/>
-              <a:t>Second level</a:t>
-            </a:r>
-          </a:p>
-          <a:p>
-            <a:pPr lvl="2"/>
-            <a:r>
-              <a:rPr lang="en-US" smtClean="0"/>
-              <a:t>Third level</a:t>
-            </a:r>
-          </a:p>
-          <a:p>
-            <a:pPr lvl="3"/>
-            <a:r>
-              <a:rPr lang="en-US" smtClean="0"/>
-              <a:t>Fourth level</a:t>
-            </a:r>
-          </a:p>
-          <a:p>
-            <a:pPr lvl="4"/>
-            <a:r>
-              <a:rPr lang="en-US" smtClean="0"/>
-              <a:t>Fifth level</a:t>
-            </a:r>
-            <a:endParaRPr lang="en-US"/>
-          </a:p>
-        </p:txBody>
-      </p:sp>
-      <p:sp>
-        <p:nvSpPr>
-          <p:cNvPr id="5" name="Date Placeholder 4"/>
-          <p:cNvSpPr>
-            <a:spLocks noGrp="1"/>
-          </p:cNvSpPr>
-          <p:nvPr>
-            <p:ph type="dt" sz="half" idx="10"/>
-          </p:nvPr>
-        </p:nvSpPr>
-        <p:spPr/>
-        <p:txBody>
-          <a:bodyPr/>
-          <a:lstStyle/>
-          <a:p>
-            <a:fld id="{5BCAD085-E8A6-8845-BD4E-CB4CCA059FC4}" type="datetimeFigureOut">
-              <a:rPr lang="en-US" smtClean="0"/>
-              <a:t>1/27/13</a:t>
+              <a:t>1/2/22</a:t>
             </a:fld>
             <a:endParaRPr lang="en-US"/>
           </a:p>
@@ -1398,7 +1403,7 @@
           <a:bodyPr/>
           <a:lstStyle/>
           <a:p>
-            <a:fld id="{C1FF6DA9-008F-8B48-92A6-B652298478BF}" type="slidenum">
+            <a:fld id="{C5EF2332-01BF-834F-8236-50238282D533}" type="slidenum">
               <a:rPr lang="en-US" smtClean="0"/>
               <a:t>‹#›</a:t>
             </a:fld>
@@ -1409,7 +1414,7 @@
     </p:spTree>
     <p:extLst>
       <p:ext uri="{BB962C8B-B14F-4D97-AF65-F5344CB8AC3E}">
-        <p14:creationId xmlns:p14="http://schemas.microsoft.com/office/powerpoint/2010/main" val="2782244947"/>
+        <p14:creationId xmlns:p14="http://schemas.microsoft.com/office/powerpoint/2010/main" val="2619886245"/>
       </p:ext>
     </p:extLst>
   </p:cSld>
@@ -1456,10 +1461,9 @@
           </a:lstStyle>
           <a:p>
             <a:r>
-              <a:rPr lang="en-US" smtClean="0"/>
+              <a:rPr lang="en-US"/>
               <a:t>Click to edit Master title style</a:t>
             </a:r>
-            <a:endParaRPr lang="en-US"/>
           </a:p>
         </p:txBody>
       </p:sp>
@@ -1475,8 +1479,8 @@
         </p:nvSpPr>
         <p:spPr>
           <a:xfrm>
-            <a:off x="457200" y="1535113"/>
-            <a:ext cx="4040188" cy="639762"/>
+            <a:off x="457200" y="1151335"/>
+            <a:ext cx="4040188" cy="479822"/>
           </a:xfrm>
         </p:spPr>
         <p:txBody>
@@ -1484,45 +1488,45 @@
           <a:lstStyle>
             <a:lvl1pPr marL="0" indent="0">
               <a:buNone/>
-              <a:defRPr sz="2400" b="1"/>
+              <a:defRPr sz="1800" b="1"/>
             </a:lvl1pPr>
-            <a:lvl2pPr marL="457200" indent="0">
-              <a:buNone/>
-              <a:defRPr sz="2000" b="1"/>
+            <a:lvl2pPr marL="342900" indent="0">
+              <a:buNone/>
+              <a:defRPr sz="1500" b="1"/>
             </a:lvl2pPr>
-            <a:lvl3pPr marL="914400" indent="0">
-              <a:buNone/>
-              <a:defRPr sz="1800" b="1"/>
+            <a:lvl3pPr marL="685800" indent="0">
+              <a:buNone/>
+              <a:defRPr sz="1350" b="1"/>
             </a:lvl3pPr>
-            <a:lvl4pPr marL="1371600" indent="0">
-              <a:buNone/>
-              <a:defRPr sz="1600" b="1"/>
+            <a:lvl4pPr marL="1028700" indent="0">
+              <a:buNone/>
+              <a:defRPr sz="1200" b="1"/>
             </a:lvl4pPr>
-            <a:lvl5pPr marL="1828800" indent="0">
-              <a:buNone/>
-              <a:defRPr sz="1600" b="1"/>
+            <a:lvl5pPr marL="1371600" indent="0">
+              <a:buNone/>
+              <a:defRPr sz="1200" b="1"/>
             </a:lvl5pPr>
-            <a:lvl6pPr marL="2286000" indent="0">
-              <a:buNone/>
-              <a:defRPr sz="1600" b="1"/>
+            <a:lvl6pPr marL="1714500" indent="0">
+              <a:buNone/>
+              <a:defRPr sz="1200" b="1"/>
             </a:lvl6pPr>
-            <a:lvl7pPr marL="2743200" indent="0">
-              <a:buNone/>
-              <a:defRPr sz="1600" b="1"/>
+            <a:lvl7pPr marL="2057400" indent="0">
+              <a:buNone/>
+              <a:defRPr sz="1200" b="1"/>
             </a:lvl7pPr>
-            <a:lvl8pPr marL="3200400" indent="0">
-              <a:buNone/>
-              <a:defRPr sz="1600" b="1"/>
+            <a:lvl8pPr marL="2400300" indent="0">
+              <a:buNone/>
+              <a:defRPr sz="1200" b="1"/>
             </a:lvl8pPr>
-            <a:lvl9pPr marL="3657600" indent="0">
-              <a:buNone/>
-              <a:defRPr sz="1600" b="1"/>
+            <a:lvl9pPr marL="2743200" indent="0">
+              <a:buNone/>
+              <a:defRPr sz="1200" b="1"/>
             </a:lvl9pPr>
           </a:lstStyle>
           <a:p>
             <a:pPr lvl="0"/>
             <a:r>
-              <a:rPr lang="en-US" smtClean="0"/>
+              <a:rPr lang="en-US"/>
               <a:t>Click to edit Master text styles</a:t>
             </a:r>
           </a:p>
@@ -1540,76 +1544,75 @@
         </p:nvSpPr>
         <p:spPr>
           <a:xfrm>
-            <a:off x="457200" y="2174875"/>
-            <a:ext cx="4040188" cy="3951288"/>
+            <a:off x="457200" y="1631156"/>
+            <a:ext cx="4040188" cy="2963466"/>
           </a:xfrm>
         </p:spPr>
         <p:txBody>
           <a:bodyPr/>
           <a:lstStyle>
             <a:lvl1pPr>
-              <a:defRPr sz="2400"/>
+              <a:defRPr sz="1800"/>
             </a:lvl1pPr>
             <a:lvl2pPr>
-              <a:defRPr sz="2000"/>
+              <a:defRPr sz="1500"/>
             </a:lvl2pPr>
             <a:lvl3pPr>
-              <a:defRPr sz="1800"/>
+              <a:defRPr sz="1350"/>
             </a:lvl3pPr>
             <a:lvl4pPr>
-              <a:defRPr sz="1600"/>
+              <a:defRPr sz="1200"/>
             </a:lvl4pPr>
             <a:lvl5pPr>
-              <a:defRPr sz="1600"/>
+              <a:defRPr sz="1200"/>
             </a:lvl5pPr>
             <a:lvl6pPr>
-              <a:defRPr sz="1600"/>
+              <a:defRPr sz="1200"/>
             </a:lvl6pPr>
             <a:lvl7pPr>
-              <a:defRPr sz="1600"/>
+              <a:defRPr sz="1200"/>
             </a:lvl7pPr>
             <a:lvl8pPr>
-              <a:defRPr sz="1600"/>
+              <a:defRPr sz="1200"/>
             </a:lvl8pPr>
             <a:lvl9pPr>
-              <a:defRPr sz="1600"/>
+              <a:defRPr sz="1200"/>
             </a:lvl9pPr>
           </a:lstStyle>
           <a:p>
             <a:pPr lvl="0"/>
             <a:r>
-              <a:rPr lang="en-US" smtClean="0"/>
+              <a:rPr lang="en-US"/>
               <a:t>Click to edit Master text styles</a:t>
             </a:r>
           </a:p>
           <a:p>
             <a:pPr lvl="1"/>
             <a:r>
-              <a:rPr lang="en-US" smtClean="0"/>
+              <a:rPr lang="en-US"/>
               <a:t>Second level</a:t>
             </a:r>
           </a:p>
           <a:p>
             <a:pPr lvl="2"/>
             <a:r>
-              <a:rPr lang="en-US" smtClean="0"/>
+              <a:rPr lang="en-US"/>
               <a:t>Third level</a:t>
             </a:r>
           </a:p>
           <a:p>
             <a:pPr lvl="3"/>
             <a:r>
-              <a:rPr lang="en-US" smtClean="0"/>
+              <a:rPr lang="en-US"/>
               <a:t>Fourth level</a:t>
             </a:r>
           </a:p>
           <a:p>
             <a:pPr lvl="4"/>
             <a:r>
-              <a:rPr lang="en-US" smtClean="0"/>
+              <a:rPr lang="en-US"/>
               <a:t>Fifth level</a:t>
             </a:r>
-            <a:endParaRPr lang="en-US"/>
           </a:p>
         </p:txBody>
       </p:sp>
@@ -1625,8 +1628,8 @@
         </p:nvSpPr>
         <p:spPr>
           <a:xfrm>
-            <a:off x="4645025" y="1535113"/>
-            <a:ext cx="4041775" cy="639762"/>
+            <a:off x="4645026" y="1151335"/>
+            <a:ext cx="4041775" cy="479822"/>
           </a:xfrm>
         </p:spPr>
         <p:txBody>
@@ -1634,45 +1637,45 @@
           <a:lstStyle>
             <a:lvl1pPr marL="0" indent="0">
               <a:buNone/>
-              <a:defRPr sz="2400" b="1"/>
+              <a:defRPr sz="1800" b="1"/>
             </a:lvl1pPr>
-            <a:lvl2pPr marL="457200" indent="0">
-              <a:buNone/>
-              <a:defRPr sz="2000" b="1"/>
+            <a:lvl2pPr marL="342900" indent="0">
+              <a:buNone/>
+              <a:defRPr sz="1500" b="1"/>
             </a:lvl2pPr>
-            <a:lvl3pPr marL="914400" indent="0">
-              <a:buNone/>
-              <a:defRPr sz="1800" b="1"/>
+            <a:lvl3pPr marL="685800" indent="0">
+              <a:buNone/>
+              <a:defRPr sz="1350" b="1"/>
             </a:lvl3pPr>
-            <a:lvl4pPr marL="1371600" indent="0">
-              <a:buNone/>
-              <a:defRPr sz="1600" b="1"/>
+            <a:lvl4pPr marL="1028700" indent="0">
+              <a:buNone/>
+              <a:defRPr sz="1200" b="1"/>
             </a:lvl4pPr>
-            <a:lvl5pPr marL="1828800" indent="0">
-              <a:buNone/>
-              <a:defRPr sz="1600" b="1"/>
+            <a:lvl5pPr marL="1371600" indent="0">
+              <a:buNone/>
+              <a:defRPr sz="1200" b="1"/>
             </a:lvl5pPr>
-            <a:lvl6pPr marL="2286000" indent="0">
-              <a:buNone/>
-              <a:defRPr sz="1600" b="1"/>
+            <a:lvl6pPr marL="1714500" indent="0">
+              <a:buNone/>
+              <a:defRPr sz="1200" b="1"/>
             </a:lvl6pPr>
-            <a:lvl7pPr marL="2743200" indent="0">
-              <a:buNone/>
-              <a:defRPr sz="1600" b="1"/>
+            <a:lvl7pPr marL="2057400" indent="0">
+              <a:buNone/>
+              <a:defRPr sz="1200" b="1"/>
             </a:lvl7pPr>
-            <a:lvl8pPr marL="3200400" indent="0">
-              <a:buNone/>
-              <a:defRPr sz="1600" b="1"/>
+            <a:lvl8pPr marL="2400300" indent="0">
+              <a:buNone/>
+              <a:defRPr sz="1200" b="1"/>
             </a:lvl8pPr>
-            <a:lvl9pPr marL="3657600" indent="0">
-              <a:buNone/>
-              <a:defRPr sz="1600" b="1"/>
+            <a:lvl9pPr marL="2743200" indent="0">
+              <a:buNone/>
+              <a:defRPr sz="1200" b="1"/>
             </a:lvl9pPr>
           </a:lstStyle>
           <a:p>
             <a:pPr lvl="0"/>
             <a:r>
-              <a:rPr lang="en-US" smtClean="0"/>
+              <a:rPr lang="en-US"/>
               <a:t>Click to edit Master text styles</a:t>
             </a:r>
           </a:p>
@@ -1690,97 +1693,96 @@
         </p:nvSpPr>
         <p:spPr>
           <a:xfrm>
-            <a:off x="4645025" y="2174875"/>
-            <a:ext cx="4041775" cy="3951288"/>
+            <a:off x="4645026" y="1631156"/>
+            <a:ext cx="4041775" cy="2963466"/>
           </a:xfrm>
         </p:spPr>
         <p:txBody>
           <a:bodyPr/>
           <a:lstStyle>
             <a:lvl1pPr>
-              <a:defRPr sz="2400"/>
+              <a:defRPr sz="1800"/>
             </a:lvl1pPr>
             <a:lvl2pPr>
-              <a:defRPr sz="2000"/>
+              <a:defRPr sz="1500"/>
             </a:lvl2pPr>
             <a:lvl3pPr>
-              <a:defRPr sz="1800"/>
+              <a:defRPr sz="1350"/>
             </a:lvl3pPr>
             <a:lvl4pPr>
-              <a:defRPr sz="1600"/>
+              <a:defRPr sz="1200"/>
             </a:lvl4pPr>
             <a:lvl5pPr>
-              <a:defRPr sz="1600"/>
+              <a:defRPr sz="1200"/>
             </a:lvl5pPr>
             <a:lvl6pPr>
-              <a:defRPr sz="1600"/>
+              <a:defRPr sz="1200"/>
             </a:lvl6pPr>
             <a:lvl7pPr>
-              <a:defRPr sz="1600"/>
+              <a:defRPr sz="1200"/>
             </a:lvl7pPr>
             <a:lvl8pPr>
-              <a:defRPr sz="1600"/>
+              <a:defRPr sz="1200"/>
             </a:lvl8pPr>
             <a:lvl9pPr>
-              <a:defRPr sz="1600"/>
+              <a:defRPr sz="1200"/>
             </a:lvl9pPr>
           </a:lstStyle>
           <a:p>
             <a:pPr lvl="0"/>
             <a:r>
+              <a:rPr lang="en-US"/>
+              <a:t>Click to edit Master text styles</a:t>
+            </a:r>
+          </a:p>
+          <a:p>
+            <a:pPr lvl="1"/>
+            <a:r>
+              <a:rPr lang="en-US"/>
+              <a:t>Second level</a:t>
+            </a:r>
+          </a:p>
+          <a:p>
+            <a:pPr lvl="2"/>
+            <a:r>
+              <a:rPr lang="en-US"/>
+              <a:t>Third level</a:t>
+            </a:r>
+          </a:p>
+          <a:p>
+            <a:pPr lvl="3"/>
+            <a:r>
+              <a:rPr lang="en-US"/>
+              <a:t>Fourth level</a:t>
+            </a:r>
+          </a:p>
+          <a:p>
+            <a:pPr lvl="4"/>
+            <a:r>
+              <a:rPr lang="en-US"/>
+              <a:t>Fifth level</a:t>
+            </a:r>
+          </a:p>
+        </p:txBody>
+      </p:sp>
+      <p:sp>
+        <p:nvSpPr>
+          <p:cNvPr id="7" name="Date Placeholder 6"/>
+          <p:cNvSpPr>
+            <a:spLocks noGrp="1"/>
+          </p:cNvSpPr>
+          <p:nvPr>
+            <p:ph type="dt" sz="half" idx="10"/>
+          </p:nvPr>
+        </p:nvSpPr>
+        <p:spPr/>
+        <p:txBody>
+          <a:bodyPr/>
+          <a:lstStyle/>
+          <a:p>
+            <a:fld id="{241EB5C9-1307-BA42-ABA2-0BC069CD8E7F}" type="datetimeFigureOut">
               <a:rPr lang="en-US" smtClean="0"/>
-              <a:t>Click to edit Master text styles</a:t>
-            </a:r>
-          </a:p>
-          <a:p>
-            <a:pPr lvl="1"/>
-            <a:r>
-              <a:rPr lang="en-US" smtClean="0"/>
-              <a:t>Second level</a:t>
-            </a:r>
-          </a:p>
-          <a:p>
-            <a:pPr lvl="2"/>
-            <a:r>
-              <a:rPr lang="en-US" smtClean="0"/>
-              <a:t>Third level</a:t>
-            </a:r>
-          </a:p>
-          <a:p>
-            <a:pPr lvl="3"/>
-            <a:r>
-              <a:rPr lang="en-US" smtClean="0"/>
-              <a:t>Fourth level</a:t>
-            </a:r>
-          </a:p>
-          <a:p>
-            <a:pPr lvl="4"/>
-            <a:r>
-              <a:rPr lang="en-US" smtClean="0"/>
-              <a:t>Fifth level</a:t>
-            </a:r>
-            <a:endParaRPr lang="en-US"/>
-          </a:p>
-        </p:txBody>
-      </p:sp>
-      <p:sp>
-        <p:nvSpPr>
-          <p:cNvPr id="7" name="Date Placeholder 6"/>
-          <p:cNvSpPr>
-            <a:spLocks noGrp="1"/>
-          </p:cNvSpPr>
-          <p:nvPr>
-            <p:ph type="dt" sz="half" idx="10"/>
-          </p:nvPr>
-        </p:nvSpPr>
-        <p:spPr/>
-        <p:txBody>
-          <a:bodyPr/>
-          <a:lstStyle/>
-          <a:p>
-            <a:fld id="{5BCAD085-E8A6-8845-BD4E-CB4CCA059FC4}" type="datetimeFigureOut">
-              <a:rPr lang="en-US" smtClean="0"/>
-              <a:t>1/27/13</a:t>
+              <a:t>1/2/22</a:t>
             </a:fld>
             <a:endParaRPr lang="en-US"/>
           </a:p>
@@ -1820,7 +1822,7 @@
           <a:bodyPr/>
           <a:lstStyle/>
           <a:p>
-            <a:fld id="{C1FF6DA9-008F-8B48-92A6-B652298478BF}" type="slidenum">
+            <a:fld id="{C5EF2332-01BF-834F-8236-50238282D533}" type="slidenum">
               <a:rPr lang="en-US" smtClean="0"/>
               <a:t>‹#›</a:t>
             </a:fld>
@@ -1831,7 +1833,7 @@
     </p:spTree>
     <p:extLst>
       <p:ext uri="{BB962C8B-B14F-4D97-AF65-F5344CB8AC3E}">
-        <p14:creationId xmlns:p14="http://schemas.microsoft.com/office/powerpoint/2010/main" val="990158736"/>
+        <p14:creationId xmlns:p14="http://schemas.microsoft.com/office/powerpoint/2010/main" val="2535793967"/>
       </p:ext>
     </p:extLst>
   </p:cSld>
@@ -1874,31 +1876,30 @@
           <a:lstStyle/>
           <a:p>
             <a:r>
+              <a:rPr lang="en-US"/>
+              <a:t>Click to edit Master title style</a:t>
+            </a:r>
+          </a:p>
+        </p:txBody>
+      </p:sp>
+      <p:sp>
+        <p:nvSpPr>
+          <p:cNvPr id="3" name="Date Placeholder 2"/>
+          <p:cNvSpPr>
+            <a:spLocks noGrp="1"/>
+          </p:cNvSpPr>
+          <p:nvPr>
+            <p:ph type="dt" sz="half" idx="10"/>
+          </p:nvPr>
+        </p:nvSpPr>
+        <p:spPr/>
+        <p:txBody>
+          <a:bodyPr/>
+          <a:lstStyle/>
+          <a:p>
+            <a:fld id="{241EB5C9-1307-BA42-ABA2-0BC069CD8E7F}" type="datetimeFigureOut">
               <a:rPr lang="en-US" smtClean="0"/>
-              <a:t>Click to edit Master title style</a:t>
-            </a:r>
-            <a:endParaRPr lang="en-US"/>
-          </a:p>
-        </p:txBody>
-      </p:sp>
-      <p:sp>
-        <p:nvSpPr>
-          <p:cNvPr id="3" name="Date Placeholder 2"/>
-          <p:cNvSpPr>
-            <a:spLocks noGrp="1"/>
-          </p:cNvSpPr>
-          <p:nvPr>
-            <p:ph type="dt" sz="half" idx="10"/>
-          </p:nvPr>
-        </p:nvSpPr>
-        <p:spPr/>
-        <p:txBody>
-          <a:bodyPr/>
-          <a:lstStyle/>
-          <a:p>
-            <a:fld id="{5BCAD085-E8A6-8845-BD4E-CB4CCA059FC4}" type="datetimeFigureOut">
-              <a:rPr lang="en-US" smtClean="0"/>
-              <a:t>1/27/13</a:t>
+              <a:t>1/2/22</a:t>
             </a:fld>
             <a:endParaRPr lang="en-US"/>
           </a:p>
@@ -1938,7 +1939,7 @@
           <a:bodyPr/>
           <a:lstStyle/>
           <a:p>
-            <a:fld id="{C1FF6DA9-008F-8B48-92A6-B652298478BF}" type="slidenum">
+            <a:fld id="{C5EF2332-01BF-834F-8236-50238282D533}" type="slidenum">
               <a:rPr lang="en-US" smtClean="0"/>
               <a:t>‹#›</a:t>
             </a:fld>
@@ -1949,7 +1950,7 @@
     </p:spTree>
     <p:extLst>
       <p:ext uri="{BB962C8B-B14F-4D97-AF65-F5344CB8AC3E}">
-        <p14:creationId xmlns:p14="http://schemas.microsoft.com/office/powerpoint/2010/main" val="727027711"/>
+        <p14:creationId xmlns:p14="http://schemas.microsoft.com/office/powerpoint/2010/main" val="3472721253"/>
       </p:ext>
     </p:extLst>
   </p:cSld>
@@ -1991,9 +1992,9 @@
           <a:bodyPr/>
           <a:lstStyle/>
           <a:p>
-            <a:fld id="{5BCAD085-E8A6-8845-BD4E-CB4CCA059FC4}" type="datetimeFigureOut">
+            <a:fld id="{241EB5C9-1307-BA42-ABA2-0BC069CD8E7F}" type="datetimeFigureOut">
               <a:rPr lang="en-US" smtClean="0"/>
-              <a:t>1/27/13</a:t>
+              <a:t>1/2/22</a:t>
             </a:fld>
             <a:endParaRPr lang="en-US"/>
           </a:p>
@@ -2033,7 +2034,7 @@
           <a:bodyPr/>
           <a:lstStyle/>
           <a:p>
-            <a:fld id="{C1FF6DA9-008F-8B48-92A6-B652298478BF}" type="slidenum">
+            <a:fld id="{C5EF2332-01BF-834F-8236-50238282D533}" type="slidenum">
               <a:rPr lang="en-US" smtClean="0"/>
               <a:t>‹#›</a:t>
             </a:fld>
@@ -2044,7 +2045,7 @@
     </p:spTree>
     <p:extLst>
       <p:ext uri="{BB962C8B-B14F-4D97-AF65-F5344CB8AC3E}">
-        <p14:creationId xmlns:p14="http://schemas.microsoft.com/office/powerpoint/2010/main" val="1212999818"/>
+        <p14:creationId xmlns:p14="http://schemas.microsoft.com/office/powerpoint/2010/main" val="2130901097"/>
       </p:ext>
     </p:extLst>
   </p:cSld>
@@ -2083,23 +2084,22 @@
         </p:nvSpPr>
         <p:spPr>
           <a:xfrm>
-            <a:off x="457200" y="273050"/>
-            <a:ext cx="3008313" cy="1162050"/>
+            <a:off x="457201" y="204787"/>
+            <a:ext cx="3008313" cy="871538"/>
           </a:xfrm>
         </p:spPr>
         <p:txBody>
           <a:bodyPr anchor="b"/>
           <a:lstStyle>
             <a:lvl1pPr algn="l">
-              <a:defRPr sz="2000" b="1"/>
+              <a:defRPr sz="1500" b="1"/>
             </a:lvl1pPr>
           </a:lstStyle>
           <a:p>
             <a:r>
-              <a:rPr lang="en-US" smtClean="0"/>
+              <a:rPr lang="en-US"/>
               <a:t>Click to edit Master title style</a:t>
             </a:r>
-            <a:endParaRPr lang="en-US"/>
           </a:p>
         </p:txBody>
       </p:sp>
@@ -2115,76 +2115,75 @@
         </p:nvSpPr>
         <p:spPr>
           <a:xfrm>
-            <a:off x="3575050" y="273050"/>
-            <a:ext cx="5111750" cy="5853113"/>
+            <a:off x="3575050" y="204788"/>
+            <a:ext cx="5111750" cy="4389835"/>
           </a:xfrm>
         </p:spPr>
         <p:txBody>
           <a:bodyPr/>
           <a:lstStyle>
             <a:lvl1pPr>
-              <a:defRPr sz="3200"/>
+              <a:defRPr sz="2400"/>
             </a:lvl1pPr>
             <a:lvl2pPr>
-              <a:defRPr sz="2800"/>
+              <a:defRPr sz="2100"/>
             </a:lvl2pPr>
             <a:lvl3pPr>
-              <a:defRPr sz="2400"/>
+              <a:defRPr sz="1800"/>
             </a:lvl3pPr>
             <a:lvl4pPr>
-              <a:defRPr sz="2000"/>
+              <a:defRPr sz="1500"/>
             </a:lvl4pPr>
             <a:lvl5pPr>
-              <a:defRPr sz="2000"/>
+              <a:defRPr sz="1500"/>
             </a:lvl5pPr>
             <a:lvl6pPr>
-              <a:defRPr sz="2000"/>
+              <a:defRPr sz="1500"/>
             </a:lvl6pPr>
             <a:lvl7pPr>
-              <a:defRPr sz="2000"/>
+              <a:defRPr sz="1500"/>
             </a:lvl7pPr>
             <a:lvl8pPr>
-              <a:defRPr sz="2000"/>
+              <a:defRPr sz="1500"/>
             </a:lvl8pPr>
             <a:lvl9pPr>
-              <a:defRPr sz="2000"/>
+              <a:defRPr sz="1500"/>
             </a:lvl9pPr>
           </a:lstStyle>
           <a:p>
             <a:pPr lvl="0"/>
             <a:r>
-              <a:rPr lang="en-US" smtClean="0"/>
+              <a:rPr lang="en-US"/>
               <a:t>Click to edit Master text styles</a:t>
             </a:r>
           </a:p>
           <a:p>
             <a:pPr lvl="1"/>
             <a:r>
-              <a:rPr lang="en-US" smtClean="0"/>
+              <a:rPr lang="en-US"/>
               <a:t>Second level</a:t>
             </a:r>
           </a:p>
           <a:p>
             <a:pPr lvl="2"/>
             <a:r>
-              <a:rPr lang="en-US" smtClean="0"/>
+              <a:rPr lang="en-US"/>
               <a:t>Third level</a:t>
             </a:r>
           </a:p>
           <a:p>
             <a:pPr lvl="3"/>
             <a:r>
-              <a:rPr lang="en-US" smtClean="0"/>
+              <a:rPr lang="en-US"/>
               <a:t>Fourth level</a:t>
             </a:r>
           </a:p>
           <a:p>
             <a:pPr lvl="4"/>
             <a:r>
-              <a:rPr lang="en-US" smtClean="0"/>
+              <a:rPr lang="en-US"/>
               <a:t>Fifth level</a:t>
             </a:r>
-            <a:endParaRPr lang="en-US"/>
           </a:p>
         </p:txBody>
       </p:sp>
@@ -2200,8 +2199,8 @@
         </p:nvSpPr>
         <p:spPr>
           <a:xfrm>
-            <a:off x="457200" y="1435100"/>
-            <a:ext cx="3008313" cy="4691063"/>
+            <a:off x="457201" y="1076326"/>
+            <a:ext cx="3008313" cy="3518297"/>
           </a:xfrm>
         </p:spPr>
         <p:txBody>
@@ -2209,68 +2208,68 @@
           <a:lstStyle>
             <a:lvl1pPr marL="0" indent="0">
               <a:buNone/>
-              <a:defRPr sz="1400"/>
+              <a:defRPr sz="1050"/>
             </a:lvl1pPr>
-            <a:lvl2pPr marL="457200" indent="0">
-              <a:buNone/>
-              <a:defRPr sz="1200"/>
+            <a:lvl2pPr marL="342900" indent="0">
+              <a:buNone/>
+              <a:defRPr sz="900"/>
             </a:lvl2pPr>
-            <a:lvl3pPr marL="914400" indent="0">
-              <a:buNone/>
-              <a:defRPr sz="1000"/>
+            <a:lvl3pPr marL="685800" indent="0">
+              <a:buNone/>
+              <a:defRPr sz="750"/>
             </a:lvl3pPr>
-            <a:lvl4pPr marL="1371600" indent="0">
-              <a:buNone/>
-              <a:defRPr sz="900"/>
+            <a:lvl4pPr marL="1028700" indent="0">
+              <a:buNone/>
+              <a:defRPr sz="675"/>
             </a:lvl4pPr>
-            <a:lvl5pPr marL="1828800" indent="0">
-              <a:buNone/>
-              <a:defRPr sz="900"/>
+            <a:lvl5pPr marL="1371600" indent="0">
+              <a:buNone/>
+              <a:defRPr sz="675"/>
             </a:lvl5pPr>
-            <a:lvl6pPr marL="2286000" indent="0">
-              <a:buNone/>
-              <a:defRPr sz="900"/>
+            <a:lvl6pPr marL="1714500" indent="0">
+              <a:buNone/>
+              <a:defRPr sz="675"/>
             </a:lvl6pPr>
-            <a:lvl7pPr marL="2743200" indent="0">
-              <a:buNone/>
-              <a:defRPr sz="900"/>
+            <a:lvl7pPr marL="2057400" indent="0">
+              <a:buNone/>
+              <a:defRPr sz="675"/>
             </a:lvl7pPr>
-            <a:lvl8pPr marL="3200400" indent="0">
-              <a:buNone/>
-              <a:defRPr sz="900"/>
+            <a:lvl8pPr marL="2400300" indent="0">
+              <a:buNone/>
+              <a:defRPr sz="675"/>
             </a:lvl8pPr>
-            <a:lvl9pPr marL="3657600" indent="0">
-              <a:buNone/>
-              <a:defRPr sz="900"/>
+            <a:lvl9pPr marL="2743200" indent="0">
+              <a:buNone/>
+              <a:defRPr sz="675"/>
             </a:lvl9pPr>
           </a:lstStyle>
           <a:p>
             <a:pPr lvl="0"/>
             <a:r>
+              <a:rPr lang="en-US"/>
+              <a:t>Click to edit Master text styles</a:t>
+            </a:r>
+          </a:p>
+        </p:txBody>
+      </p:sp>
+      <p:sp>
+        <p:nvSpPr>
+          <p:cNvPr id="5" name="Date Placeholder 4"/>
+          <p:cNvSpPr>
+            <a:spLocks noGrp="1"/>
+          </p:cNvSpPr>
+          <p:nvPr>
+            <p:ph type="dt" sz="half" idx="10"/>
+          </p:nvPr>
+        </p:nvSpPr>
+        <p:spPr/>
+        <p:txBody>
+          <a:bodyPr/>
+          <a:lstStyle/>
+          <a:p>
+            <a:fld id="{241EB5C9-1307-BA42-ABA2-0BC069CD8E7F}" type="datetimeFigureOut">
               <a:rPr lang="en-US" smtClean="0"/>
-              <a:t>Click to edit Master text styles</a:t>
-            </a:r>
-          </a:p>
-        </p:txBody>
-      </p:sp>
-      <p:sp>
-        <p:nvSpPr>
-          <p:cNvPr id="5" name="Date Placeholder 4"/>
-          <p:cNvSpPr>
-            <a:spLocks noGrp="1"/>
-          </p:cNvSpPr>
-          <p:nvPr>
-            <p:ph type="dt" sz="half" idx="10"/>
-          </p:nvPr>
-        </p:nvSpPr>
-        <p:spPr/>
-        <p:txBody>
-          <a:bodyPr/>
-          <a:lstStyle/>
-          <a:p>
-            <a:fld id="{5BCAD085-E8A6-8845-BD4E-CB4CCA059FC4}" type="datetimeFigureOut">
-              <a:rPr lang="en-US" smtClean="0"/>
-              <a:t>1/27/13</a:t>
+              <a:t>1/2/22</a:t>
             </a:fld>
             <a:endParaRPr lang="en-US"/>
           </a:p>
@@ -2310,7 +2309,7 @@
           <a:bodyPr/>
           <a:lstStyle/>
           <a:p>
-            <a:fld id="{C1FF6DA9-008F-8B48-92A6-B652298478BF}" type="slidenum">
+            <a:fld id="{C5EF2332-01BF-834F-8236-50238282D533}" type="slidenum">
               <a:rPr lang="en-US" smtClean="0"/>
               <a:t>‹#›</a:t>
             </a:fld>
@@ -2321,7 +2320,7 @@
     </p:spTree>
     <p:extLst>
       <p:ext uri="{BB962C8B-B14F-4D97-AF65-F5344CB8AC3E}">
-        <p14:creationId xmlns:p14="http://schemas.microsoft.com/office/powerpoint/2010/main" val="1840726560"/>
+        <p14:creationId xmlns:p14="http://schemas.microsoft.com/office/powerpoint/2010/main" val="3540895647"/>
       </p:ext>
     </p:extLst>
   </p:cSld>
@@ -2360,23 +2359,22 @@
         </p:nvSpPr>
         <p:spPr>
           <a:xfrm>
-            <a:off x="1792288" y="4800600"/>
-            <a:ext cx="5486400" cy="566738"/>
+            <a:off x="1792288" y="3600450"/>
+            <a:ext cx="5486400" cy="425054"/>
           </a:xfrm>
         </p:spPr>
         <p:txBody>
           <a:bodyPr anchor="b"/>
           <a:lstStyle>
             <a:lvl1pPr algn="l">
-              <a:defRPr sz="2000" b="1"/>
+              <a:defRPr sz="1500" b="1"/>
             </a:lvl1pPr>
           </a:lstStyle>
           <a:p>
             <a:r>
-              <a:rPr lang="en-US" smtClean="0"/>
+              <a:rPr lang="en-US"/>
               <a:t>Click to edit Master title style</a:t>
             </a:r>
-            <a:endParaRPr lang="en-US"/>
           </a:p>
         </p:txBody>
       </p:sp>
@@ -2392,8 +2390,8 @@
         </p:nvSpPr>
         <p:spPr>
           <a:xfrm>
-            <a:off x="1792288" y="612775"/>
-            <a:ext cx="5486400" cy="4114800"/>
+            <a:off x="1792288" y="459581"/>
+            <a:ext cx="5486400" cy="3086100"/>
           </a:xfrm>
         </p:spPr>
         <p:txBody>
@@ -2401,39 +2399,39 @@
           <a:lstStyle>
             <a:lvl1pPr marL="0" indent="0">
               <a:buNone/>
-              <a:defRPr sz="3200"/>
+              <a:defRPr sz="2400"/>
             </a:lvl1pPr>
-            <a:lvl2pPr marL="457200" indent="0">
-              <a:buNone/>
-              <a:defRPr sz="2800"/>
+            <a:lvl2pPr marL="342900" indent="0">
+              <a:buNone/>
+              <a:defRPr sz="2100"/>
             </a:lvl2pPr>
-            <a:lvl3pPr marL="914400" indent="0">
-              <a:buNone/>
-              <a:defRPr sz="2400"/>
+            <a:lvl3pPr marL="685800" indent="0">
+              <a:buNone/>
+              <a:defRPr sz="1800"/>
             </a:lvl3pPr>
-            <a:lvl4pPr marL="1371600" indent="0">
-              <a:buNone/>
-              <a:defRPr sz="2000"/>
+            <a:lvl4pPr marL="1028700" indent="0">
+              <a:buNone/>
+              <a:defRPr sz="1500"/>
             </a:lvl4pPr>
-            <a:lvl5pPr marL="1828800" indent="0">
-              <a:buNone/>
-              <a:defRPr sz="2000"/>
+            <a:lvl5pPr marL="1371600" indent="0">
+              <a:buNone/>
+              <a:defRPr sz="1500"/>
             </a:lvl5pPr>
-            <a:lvl6pPr marL="2286000" indent="0">
-              <a:buNone/>
-              <a:defRPr sz="2000"/>
+            <a:lvl6pPr marL="1714500" indent="0">
+              <a:buNone/>
+              <a:defRPr sz="1500"/>
             </a:lvl6pPr>
-            <a:lvl7pPr marL="2743200" indent="0">
-              <a:buNone/>
-              <a:defRPr sz="2000"/>
+            <a:lvl7pPr marL="2057400" indent="0">
+              <a:buNone/>
+              <a:defRPr sz="1500"/>
             </a:lvl7pPr>
-            <a:lvl8pPr marL="3200400" indent="0">
-              <a:buNone/>
-              <a:defRPr sz="2000"/>
+            <a:lvl8pPr marL="2400300" indent="0">
+              <a:buNone/>
+              <a:defRPr sz="1500"/>
             </a:lvl8pPr>
-            <a:lvl9pPr marL="3657600" indent="0">
-              <a:buNone/>
-              <a:defRPr sz="2000"/>
+            <a:lvl9pPr marL="2743200" indent="0">
+              <a:buNone/>
+              <a:defRPr sz="1500"/>
             </a:lvl9pPr>
           </a:lstStyle>
           <a:p>
@@ -2453,8 +2451,8 @@
         </p:nvSpPr>
         <p:spPr>
           <a:xfrm>
-            <a:off x="1792288" y="5367338"/>
-            <a:ext cx="5486400" cy="804862"/>
+            <a:off x="1792288" y="4025503"/>
+            <a:ext cx="5486400" cy="603647"/>
           </a:xfrm>
         </p:spPr>
         <p:txBody>
@@ -2462,68 +2460,68 @@
           <a:lstStyle>
             <a:lvl1pPr marL="0" indent="0">
               <a:buNone/>
-              <a:defRPr sz="1400"/>
+              <a:defRPr sz="1050"/>
             </a:lvl1pPr>
-            <a:lvl2pPr marL="457200" indent="0">
-              <a:buNone/>
-              <a:defRPr sz="1200"/>
+            <a:lvl2pPr marL="342900" indent="0">
+              <a:buNone/>
+              <a:defRPr sz="900"/>
             </a:lvl2pPr>
-            <a:lvl3pPr marL="914400" indent="0">
-              <a:buNone/>
-              <a:defRPr sz="1000"/>
+            <a:lvl3pPr marL="685800" indent="0">
+              <a:buNone/>
+              <a:defRPr sz="750"/>
             </a:lvl3pPr>
-            <a:lvl4pPr marL="1371600" indent="0">
-              <a:buNone/>
-              <a:defRPr sz="900"/>
+            <a:lvl4pPr marL="1028700" indent="0">
+              <a:buNone/>
+              <a:defRPr sz="675"/>
             </a:lvl4pPr>
-            <a:lvl5pPr marL="1828800" indent="0">
-              <a:buNone/>
-              <a:defRPr sz="900"/>
+            <a:lvl5pPr marL="1371600" indent="0">
+              <a:buNone/>
+              <a:defRPr sz="675"/>
             </a:lvl5pPr>
-            <a:lvl6pPr marL="2286000" indent="0">
-              <a:buNone/>
-              <a:defRPr sz="900"/>
+            <a:lvl6pPr marL="1714500" indent="0">
+              <a:buNone/>
+              <a:defRPr sz="675"/>
             </a:lvl6pPr>
-            <a:lvl7pPr marL="2743200" indent="0">
-              <a:buNone/>
-              <a:defRPr sz="900"/>
+            <a:lvl7pPr marL="2057400" indent="0">
+              <a:buNone/>
+              <a:defRPr sz="675"/>
             </a:lvl7pPr>
-            <a:lvl8pPr marL="3200400" indent="0">
-              <a:buNone/>
-              <a:defRPr sz="900"/>
+            <a:lvl8pPr marL="2400300" indent="0">
+              <a:buNone/>
+              <a:defRPr sz="675"/>
             </a:lvl8pPr>
-            <a:lvl9pPr marL="3657600" indent="0">
-              <a:buNone/>
-              <a:defRPr sz="900"/>
+            <a:lvl9pPr marL="2743200" indent="0">
+              <a:buNone/>
+              <a:defRPr sz="675"/>
             </a:lvl9pPr>
           </a:lstStyle>
           <a:p>
             <a:pPr lvl="0"/>
             <a:r>
+              <a:rPr lang="en-US"/>
+              <a:t>Click to edit Master text styles</a:t>
+            </a:r>
+          </a:p>
+        </p:txBody>
+      </p:sp>
+      <p:sp>
+        <p:nvSpPr>
+          <p:cNvPr id="5" name="Date Placeholder 4"/>
+          <p:cNvSpPr>
+            <a:spLocks noGrp="1"/>
+          </p:cNvSpPr>
+          <p:nvPr>
+            <p:ph type="dt" sz="half" idx="10"/>
+          </p:nvPr>
+        </p:nvSpPr>
+        <p:spPr/>
+        <p:txBody>
+          <a:bodyPr/>
+          <a:lstStyle/>
+          <a:p>
+            <a:fld id="{241EB5C9-1307-BA42-ABA2-0BC069CD8E7F}" type="datetimeFigureOut">
               <a:rPr lang="en-US" smtClean="0"/>
-              <a:t>Click to edit Master text styles</a:t>
-            </a:r>
-          </a:p>
-        </p:txBody>
-      </p:sp>
-      <p:sp>
-        <p:nvSpPr>
-          <p:cNvPr id="5" name="Date Placeholder 4"/>
-          <p:cNvSpPr>
-            <a:spLocks noGrp="1"/>
-          </p:cNvSpPr>
-          <p:nvPr>
-            <p:ph type="dt" sz="half" idx="10"/>
-          </p:nvPr>
-        </p:nvSpPr>
-        <p:spPr/>
-        <p:txBody>
-          <a:bodyPr/>
-          <a:lstStyle/>
-          <a:p>
-            <a:fld id="{5BCAD085-E8A6-8845-BD4E-CB4CCA059FC4}" type="datetimeFigureOut">
-              <a:rPr lang="en-US" smtClean="0"/>
-              <a:t>1/27/13</a:t>
+              <a:t>1/2/22</a:t>
             </a:fld>
             <a:endParaRPr lang="en-US"/>
           </a:p>
@@ -2563,7 +2561,7 @@
           <a:bodyPr/>
           <a:lstStyle/>
           <a:p>
-            <a:fld id="{C1FF6DA9-008F-8B48-92A6-B652298478BF}" type="slidenum">
+            <a:fld id="{C5EF2332-01BF-834F-8236-50238282D533}" type="slidenum">
               <a:rPr lang="en-US" smtClean="0"/>
               <a:t>‹#›</a:t>
             </a:fld>
@@ -2574,7 +2572,7 @@
     </p:spTree>
     <p:extLst>
       <p:ext uri="{BB962C8B-B14F-4D97-AF65-F5344CB8AC3E}">
-        <p14:creationId xmlns:p14="http://schemas.microsoft.com/office/powerpoint/2010/main" val="3889236939"/>
+        <p14:creationId xmlns:p14="http://schemas.microsoft.com/office/powerpoint/2010/main" val="3566899855"/>
       </p:ext>
     </p:extLst>
   </p:cSld>
@@ -2585,7 +2583,7 @@
 </file>
 
 <file path=ppt/slideMasters/slideMaster1.xml><?xml version="1.0" encoding="utf-8"?>
-<p:sldMaster xmlns:a="http://schemas.openxmlformats.org/drawingml/2006/main" xmlns:r="http://schemas.openxmlformats.org/officeDocument/2006/relationships" xmlns:p="http://schemas.openxmlformats.org/presentationml/2006/main">
+<p:sldMaster xmlns:a="http://schemas.openxmlformats.org/drawingml/2006/main" xmlns:p="http://schemas.openxmlformats.org/presentationml/2006/main" xmlns:r="http://schemas.openxmlformats.org/officeDocument/2006/relationships">
   <p:cSld>
     <p:bg>
       <p:bgRef idx="1001">
@@ -2618,24 +2616,23 @@
         </p:nvSpPr>
         <p:spPr>
           <a:xfrm>
-            <a:off x="457200" y="274638"/>
-            <a:ext cx="8229600" cy="1143000"/>
+            <a:off x="457200" y="205979"/>
+            <a:ext cx="8229600" cy="857250"/>
           </a:xfrm>
           <a:prstGeom prst="rect">
             <a:avLst/>
           </a:prstGeom>
         </p:spPr>
         <p:txBody>
-          <a:bodyPr vert="horz" lIns="91440" tIns="45720" rIns="91440" bIns="45720" rtlCol="0" anchor="ctr">
+          <a:bodyPr anchor="ctr" bIns="45720" lIns="91440" rIns="91440" rtlCol="0" tIns="45720" vert="horz">
             <a:normAutofit/>
           </a:bodyPr>
           <a:lstStyle/>
           <a:p>
             <a:r>
-              <a:rPr lang="en-US" smtClean="0"/>
+              <a:rPr lang="en-US"/>
               <a:t>Click to edit Master title style</a:t>
             </a:r>
-            <a:endParaRPr lang="en-US"/>
           </a:p>
         </p:txBody>
       </p:sp>
@@ -2646,58 +2643,57 @@
             <a:spLocks noGrp="1"/>
           </p:cNvSpPr>
           <p:nvPr>
-            <p:ph type="body" idx="1"/>
+            <p:ph idx="1" type="body"/>
           </p:nvPr>
         </p:nvSpPr>
         <p:spPr>
           <a:xfrm>
-            <a:off x="457200" y="1600200"/>
-            <a:ext cx="8229600" cy="4525963"/>
+            <a:off x="457200" y="1200151"/>
+            <a:ext cx="8229600" cy="3394472"/>
           </a:xfrm>
           <a:prstGeom prst="rect">
             <a:avLst/>
           </a:prstGeom>
         </p:spPr>
         <p:txBody>
-          <a:bodyPr vert="horz" lIns="91440" tIns="45720" rIns="91440" bIns="45720" rtlCol="0">
+          <a:bodyPr bIns="45720" lIns="91440" rIns="91440" rtlCol="0" tIns="45720" vert="horz">
             <a:normAutofit/>
           </a:bodyPr>
           <a:lstStyle/>
           <a:p>
             <a:pPr lvl="0"/>
             <a:r>
-              <a:rPr lang="en-US" smtClean="0"/>
+              <a:rPr lang="en-US"/>
               <a:t>Click to edit Master text styles</a:t>
             </a:r>
           </a:p>
           <a:p>
             <a:pPr lvl="1"/>
             <a:r>
-              <a:rPr lang="en-US" smtClean="0"/>
+              <a:rPr lang="en-US"/>
               <a:t>Second level</a:t>
             </a:r>
           </a:p>
           <a:p>
             <a:pPr lvl="2"/>
             <a:r>
-              <a:rPr lang="en-US" smtClean="0"/>
+              <a:rPr lang="en-US"/>
               <a:t>Third level</a:t>
             </a:r>
           </a:p>
           <a:p>
             <a:pPr lvl="3"/>
             <a:r>
-              <a:rPr lang="en-US" smtClean="0"/>
+              <a:rPr lang="en-US"/>
               <a:t>Fourth level</a:t>
             </a:r>
           </a:p>
           <a:p>
             <a:pPr lvl="4"/>
             <a:r>
-              <a:rPr lang="en-US" smtClean="0"/>
+              <a:rPr lang="en-US"/>
               <a:t>Fifth level</a:t>
             </a:r>
-            <a:endParaRPr lang="en-US"/>
           </a:p>
         </p:txBody>
       </p:sp>
@@ -2708,23 +2704,23 @@
             <a:spLocks noGrp="1"/>
           </p:cNvSpPr>
           <p:nvPr>
-            <p:ph type="dt" sz="half" idx="2"/>
+            <p:ph idx="2" sz="half" type="dt"/>
           </p:nvPr>
         </p:nvSpPr>
         <p:spPr>
           <a:xfrm>
-            <a:off x="457200" y="6356350"/>
-            <a:ext cx="2133600" cy="365125"/>
+            <a:off x="457200" y="4767263"/>
+            <a:ext cx="2133600" cy="273844"/>
           </a:xfrm>
           <a:prstGeom prst="rect">
             <a:avLst/>
           </a:prstGeom>
         </p:spPr>
         <p:txBody>
-          <a:bodyPr vert="horz" lIns="91440" tIns="45720" rIns="91440" bIns="45720" rtlCol="0" anchor="ctr"/>
+          <a:bodyPr anchor="ctr" bIns="45720" lIns="91440" rIns="91440" rtlCol="0" tIns="45720" vert="horz"/>
           <a:lstStyle>
             <a:lvl1pPr algn="l">
-              <a:defRPr sz="1200">
+              <a:defRPr sz="900">
                 <a:solidFill>
                   <a:schemeClr val="tx1">
                     <a:tint val="75000"/>
@@ -2734,9 +2730,9 @@
             </a:lvl1pPr>
           </a:lstStyle>
           <a:p>
-            <a:fld id="{5BCAD085-E8A6-8845-BD4E-CB4CCA059FC4}" type="datetimeFigureOut">
+            <a:fld id="{241EB5C9-1307-BA42-ABA2-0BC069CD8E7F}" type="datetimeFigureOut">
               <a:rPr lang="en-US" smtClean="0"/>
-              <a:t>1/27/13</a:t>
+              <a:t>1/2/22</a:t>
             </a:fld>
             <a:endParaRPr lang="en-US"/>
           </a:p>
@@ -2749,23 +2745,23 @@
             <a:spLocks noGrp="1"/>
           </p:cNvSpPr>
           <p:nvPr>
-            <p:ph type="ftr" sz="quarter" idx="3"/>
+            <p:ph idx="3" sz="quarter" type="ftr"/>
           </p:nvPr>
         </p:nvSpPr>
         <p:spPr>
           <a:xfrm>
-            <a:off x="3124200" y="6356350"/>
-            <a:ext cx="2895600" cy="365125"/>
+            <a:off x="3124200" y="4767263"/>
+            <a:ext cx="2895600" cy="273844"/>
           </a:xfrm>
           <a:prstGeom prst="rect">
             <a:avLst/>
           </a:prstGeom>
         </p:spPr>
         <p:txBody>
-          <a:bodyPr vert="horz" lIns="91440" tIns="45720" rIns="91440" bIns="45720" rtlCol="0" anchor="ctr"/>
+          <a:bodyPr anchor="ctr" bIns="45720" lIns="91440" rIns="91440" rtlCol="0" tIns="45720" vert="horz"/>
           <a:lstStyle>
             <a:lvl1pPr algn="ctr">
-              <a:defRPr sz="1200">
+              <a:defRPr sz="900">
                 <a:solidFill>
                   <a:schemeClr val="tx1">
                     <a:tint val="75000"/>
@@ -2786,23 +2782,23 @@
             <a:spLocks noGrp="1"/>
           </p:cNvSpPr>
           <p:nvPr>
-            <p:ph type="sldNum" sz="quarter" idx="4"/>
+            <p:ph idx="4" sz="quarter" type="sldNum"/>
           </p:nvPr>
         </p:nvSpPr>
         <p:spPr>
           <a:xfrm>
-            <a:off x="6553200" y="6356350"/>
-            <a:ext cx="2133600" cy="365125"/>
+            <a:off x="6553200" y="4767263"/>
+            <a:ext cx="2133600" cy="273844"/>
           </a:xfrm>
           <a:prstGeom prst="rect">
             <a:avLst/>
           </a:prstGeom>
         </p:spPr>
         <p:txBody>
-          <a:bodyPr vert="horz" lIns="91440" tIns="45720" rIns="91440" bIns="45720" rtlCol="0" anchor="ctr"/>
+          <a:bodyPr anchor="ctr" bIns="45720" lIns="91440" rIns="91440" rtlCol="0" tIns="45720" vert="horz"/>
           <a:lstStyle>
             <a:lvl1pPr algn="r">
-              <a:defRPr sz="1200">
+              <a:defRPr sz="900">
                 <a:solidFill>
                   <a:schemeClr val="tx1">
                     <a:tint val="75000"/>
@@ -2812,7 +2808,7 @@
             </a:lvl1pPr>
           </a:lstStyle>
           <a:p>
-            <a:fld id="{C1FF6DA9-008F-8B48-92A6-B652298478BF}" type="slidenum">
+            <a:fld id="{C5EF2332-01BF-834F-8236-50238282D533}" type="slidenum">
               <a:rPr lang="en-US" smtClean="0"/>
               <a:t>‹#›</a:t>
             </a:fld>
@@ -2823,11 +2819,11 @@
     </p:spTree>
     <p:extLst>
       <p:ext uri="{BB962C8B-B14F-4D97-AF65-F5344CB8AC3E}">
-        <p14:creationId xmlns:p14="http://schemas.microsoft.com/office/powerpoint/2010/main" val="2209977519"/>
+        <p14:creationId xmlns:p14="http://schemas.microsoft.com/office/powerpoint/2010/main" val="3676200875"/>
       </p:ext>
     </p:extLst>
   </p:cSld>
-  <p:clrMap bg1="lt1" tx1="dk1" bg2="lt2" tx2="dk2" accent1="accent1" accent2="accent2" accent3="accent3" accent4="accent4" accent5="accent5" accent6="accent6" hlink="hlink" folHlink="folHlink"/>
+  <p:clrMap accent1="accent1" accent2="accent2" accent3="accent3" accent4="accent4" accent5="accent5" accent6="accent6" bg1="lt1" bg2="lt2" folHlink="folHlink" hlink="hlink" tx1="dk1" tx2="dk2"/>
   <p:sldLayoutIdLst>
     <p:sldLayoutId id="2147483649" r:id="rId1"/>
     <p:sldLayoutId id="2147483650" r:id="rId2"/>
@@ -2843,12 +2839,12 @@
   </p:sldLayoutIdLst>
   <p:txStyles>
     <p:titleStyle>
-      <a:lvl1pPr algn="ctr" defTabSz="457200" rtl="0" eaLnBrk="1" latinLnBrk="0" hangingPunct="1">
+      <a:lvl1pPr algn="ctr" defTabSz="342900" eaLnBrk="1" hangingPunct="1" latinLnBrk="0" rtl="0">
         <a:spcBef>
           <a:spcPct val="0"/>
         </a:spcBef>
         <a:buNone/>
-        <a:defRPr sz="4400" kern="1200">
+        <a:defRPr kern="1200" sz="3300">
           <a:solidFill>
             <a:schemeClr val="tx1"/>
           </a:solidFill>
@@ -2859,13 +2855,13 @@
       </a:lvl1pPr>
     </p:titleStyle>
     <p:bodyStyle>
-      <a:lvl1pPr marL="342900" indent="-342900" algn="l" defTabSz="457200" rtl="0" eaLnBrk="1" latinLnBrk="0" hangingPunct="1">
+      <a:lvl1pPr algn="l" defTabSz="342900" eaLnBrk="1" hangingPunct="1" indent="-342900" latinLnBrk="0" marL="342900" rtl="0">
         <a:spcBef>
           <a:spcPct val="20000"/>
         </a:spcBef>
         <a:buFont typeface="Arial"/>
         <a:buChar char="•"/>
-        <a:defRPr sz="3200" kern="1200">
+        <a:defRPr kern="1200" sz="2400">
           <a:solidFill>
             <a:schemeClr val="tx1"/>
           </a:solidFill>
@@ -2874,13 +2870,13 @@
           <a:cs typeface="+mn-cs"/>
         </a:defRPr>
       </a:lvl1pPr>
-      <a:lvl2pPr marL="742950" indent="-285750" algn="l" defTabSz="457200" rtl="0" eaLnBrk="1" latinLnBrk="0" hangingPunct="1">
+      <a:lvl2pPr algn="l" defTabSz="342900" eaLnBrk="1" hangingPunct="1" indent="-342900" latinLnBrk="0" marL="685800" rtl="0">
         <a:spcBef>
           <a:spcPct val="20000"/>
         </a:spcBef>
         <a:buFont typeface="Arial"/>
         <a:buChar char="–"/>
-        <a:defRPr sz="2800" kern="1200">
+        <a:defRPr kern="1200" sz="2100">
           <a:solidFill>
             <a:schemeClr val="tx1"/>
           </a:solidFill>
@@ -2889,13 +2885,13 @@
           <a:cs typeface="+mn-cs"/>
         </a:defRPr>
       </a:lvl2pPr>
-      <a:lvl3pPr marL="1143000" indent="-228600" algn="l" defTabSz="457200" rtl="0" eaLnBrk="1" latinLnBrk="0" hangingPunct="1">
+      <a:lvl3pPr algn="l" defTabSz="342900" eaLnBrk="1" hangingPunct="1" indent="-342900" latinLnBrk="0" marL="1028700" rtl="0">
         <a:spcBef>
           <a:spcPct val="20000"/>
         </a:spcBef>
         <a:buFont typeface="Arial"/>
         <a:buChar char="•"/>
-        <a:defRPr sz="2400" kern="1200">
+        <a:defRPr kern="1200" sz="1800">
           <a:solidFill>
             <a:schemeClr val="tx1"/>
           </a:solidFill>
@@ -2904,13 +2900,13 @@
           <a:cs typeface="+mn-cs"/>
         </a:defRPr>
       </a:lvl3pPr>
-      <a:lvl4pPr marL="1600200" indent="-228600" algn="l" defTabSz="457200" rtl="0" eaLnBrk="1" latinLnBrk="0" hangingPunct="1">
+      <a:lvl4pPr algn="l" defTabSz="342900" eaLnBrk="1" hangingPunct="1" indent="-342900" latinLnBrk="0" marL="1371600" rtl="0">
         <a:spcBef>
           <a:spcPct val="20000"/>
         </a:spcBef>
         <a:buFont typeface="Arial"/>
         <a:buChar char="–"/>
-        <a:defRPr sz="2000" kern="1200">
+        <a:defRPr kern="1200" sz="1500">
           <a:solidFill>
             <a:schemeClr val="tx1"/>
           </a:solidFill>
@@ -2919,13 +2915,13 @@
           <a:cs typeface="+mn-cs"/>
         </a:defRPr>
       </a:lvl4pPr>
-      <a:lvl5pPr marL="2057400" indent="-228600" algn="l" defTabSz="457200" rtl="0" eaLnBrk="1" latinLnBrk="0" hangingPunct="1">
+      <a:lvl5pPr algn="l" defTabSz="342900" eaLnBrk="1" hangingPunct="1" indent="-342900" latinLnBrk="0" marL="1714500" rtl="0">
         <a:spcBef>
           <a:spcPct val="20000"/>
         </a:spcBef>
         <a:buFont typeface="Arial"/>
         <a:buChar char="»"/>
-        <a:defRPr sz="2000" kern="1200">
+        <a:defRPr kern="1200" sz="1500">
           <a:solidFill>
             <a:schemeClr val="tx1"/>
           </a:solidFill>
@@ -2934,13 +2930,13 @@
           <a:cs typeface="+mn-cs"/>
         </a:defRPr>
       </a:lvl5pPr>
-      <a:lvl6pPr marL="2514600" indent="-228600" algn="l" defTabSz="457200" rtl="0" eaLnBrk="1" latinLnBrk="0" hangingPunct="1">
+      <a:lvl6pPr algn="l" defTabSz="342900" eaLnBrk="1" hangingPunct="1" indent="-342900" latinLnBrk="0" marL="2057400" rtl="0">
         <a:spcBef>
           <a:spcPct val="20000"/>
         </a:spcBef>
         <a:buFont typeface="Arial"/>
         <a:buChar char="•"/>
-        <a:defRPr sz="2000" kern="1200">
+        <a:defRPr kern="1200" sz="1500">
           <a:solidFill>
             <a:schemeClr val="tx1"/>
           </a:solidFill>
@@ -2949,13 +2945,13 @@
           <a:cs typeface="+mn-cs"/>
         </a:defRPr>
       </a:lvl6pPr>
-      <a:lvl7pPr marL="2971800" indent="-228600" algn="l" defTabSz="457200" rtl="0" eaLnBrk="1" latinLnBrk="0" hangingPunct="1">
+      <a:lvl7pPr algn="l" defTabSz="342900" eaLnBrk="1" hangingPunct="1" indent="-342900" latinLnBrk="0" marL="2400300" rtl="0">
         <a:spcBef>
           <a:spcPct val="20000"/>
         </a:spcBef>
         <a:buFont typeface="Arial"/>
         <a:buChar char="•"/>
-        <a:defRPr sz="2000" kern="1200">
+        <a:defRPr kern="1200" sz="1500">
           <a:solidFill>
             <a:schemeClr val="tx1"/>
           </a:solidFill>
@@ -2964,13 +2960,13 @@
           <a:cs typeface="+mn-cs"/>
         </a:defRPr>
       </a:lvl7pPr>
-      <a:lvl8pPr marL="3429000" indent="-228600" algn="l" defTabSz="457200" rtl="0" eaLnBrk="1" latinLnBrk="0" hangingPunct="1">
+      <a:lvl8pPr algn="l" defTabSz="342900" eaLnBrk="1" hangingPunct="1" indent="-342900" latinLnBrk="0" marL="2743200" rtl="0">
         <a:spcBef>
           <a:spcPct val="20000"/>
         </a:spcBef>
         <a:buFont typeface="Arial"/>
         <a:buChar char="•"/>
-        <a:defRPr sz="2000" kern="1200">
+        <a:defRPr kern="1200" sz="1500">
           <a:solidFill>
             <a:schemeClr val="tx1"/>
           </a:solidFill>
@@ -2979,13 +2975,13 @@
           <a:cs typeface="+mn-cs"/>
         </a:defRPr>
       </a:lvl8pPr>
-      <a:lvl9pPr marL="3886200" indent="-228600" algn="l" defTabSz="457200" rtl="0" eaLnBrk="1" latinLnBrk="0" hangingPunct="1">
+      <a:lvl9pPr algn="l" defTabSz="342900" eaLnBrk="1" hangingPunct="1" indent="-342900" latinLnBrk="0" marL="3086100" rtl="0">
         <a:spcBef>
           <a:spcPct val="20000"/>
         </a:spcBef>
         <a:buFont typeface="Arial"/>
         <a:buChar char="•"/>
-        <a:defRPr sz="2000" kern="1200">
+        <a:defRPr kern="1200" sz="1500">
           <a:solidFill>
             <a:schemeClr val="tx1"/>
           </a:solidFill>
@@ -2999,8 +2995,8 @@
       <a:defPPr>
         <a:defRPr lang="en-US"/>
       </a:defPPr>
-      <a:lvl1pPr marL="0" algn="l" defTabSz="457200" rtl="0" eaLnBrk="1" latinLnBrk="0" hangingPunct="1">
-        <a:defRPr sz="1800" kern="1200">
+      <a:lvl1pPr algn="l" defTabSz="342900" eaLnBrk="1" hangingPunct="1" latinLnBrk="0" marL="0" rtl="0">
+        <a:defRPr kern="1200" sz="1350">
           <a:solidFill>
             <a:schemeClr val="tx1"/>
           </a:solidFill>
@@ -3009,8 +3005,8 @@
           <a:cs typeface="+mn-cs"/>
         </a:defRPr>
       </a:lvl1pPr>
-      <a:lvl2pPr marL="457200" algn="l" defTabSz="457200" rtl="0" eaLnBrk="1" latinLnBrk="0" hangingPunct="1">
-        <a:defRPr sz="1800" kern="1200">
+      <a:lvl2pPr algn="l" defTabSz="342900" eaLnBrk="1" hangingPunct="1" latinLnBrk="0" marL="342900" rtl="0">
+        <a:defRPr kern="1200" sz="1350">
           <a:solidFill>
             <a:schemeClr val="tx1"/>
           </a:solidFill>
@@ -3019,8 +3015,8 @@
           <a:cs typeface="+mn-cs"/>
         </a:defRPr>
       </a:lvl2pPr>
-      <a:lvl3pPr marL="914400" algn="l" defTabSz="457200" rtl="0" eaLnBrk="1" latinLnBrk="0" hangingPunct="1">
-        <a:defRPr sz="1800" kern="1200">
+      <a:lvl3pPr algn="l" defTabSz="342900" eaLnBrk="1" hangingPunct="1" latinLnBrk="0" marL="685800" rtl="0">
+        <a:defRPr kern="1200" sz="1350">
           <a:solidFill>
             <a:schemeClr val="tx1"/>
           </a:solidFill>
@@ -3029,8 +3025,8 @@
           <a:cs typeface="+mn-cs"/>
         </a:defRPr>
       </a:lvl3pPr>
-      <a:lvl4pPr marL="1371600" algn="l" defTabSz="457200" rtl="0" eaLnBrk="1" latinLnBrk="0" hangingPunct="1">
-        <a:defRPr sz="1800" kern="1200">
+      <a:lvl4pPr algn="l" defTabSz="342900" eaLnBrk="1" hangingPunct="1" latinLnBrk="0" marL="1028700" rtl="0">
+        <a:defRPr kern="1200" sz="1350">
           <a:solidFill>
             <a:schemeClr val="tx1"/>
           </a:solidFill>
@@ -3039,8 +3035,8 @@
           <a:cs typeface="+mn-cs"/>
         </a:defRPr>
       </a:lvl4pPr>
-      <a:lvl5pPr marL="1828800" algn="l" defTabSz="457200" rtl="0" eaLnBrk="1" latinLnBrk="0" hangingPunct="1">
-        <a:defRPr sz="1800" kern="1200">
+      <a:lvl5pPr algn="l" defTabSz="342900" eaLnBrk="1" hangingPunct="1" latinLnBrk="0" marL="1371600" rtl="0">
+        <a:defRPr kern="1200" sz="1350">
           <a:solidFill>
             <a:schemeClr val="tx1"/>
           </a:solidFill>
@@ -3049,8 +3045,8 @@
           <a:cs typeface="+mn-cs"/>
         </a:defRPr>
       </a:lvl5pPr>
-      <a:lvl6pPr marL="2286000" algn="l" defTabSz="457200" rtl="0" eaLnBrk="1" latinLnBrk="0" hangingPunct="1">
-        <a:defRPr sz="1800" kern="1200">
+      <a:lvl6pPr algn="l" defTabSz="342900" eaLnBrk="1" hangingPunct="1" latinLnBrk="0" marL="1714500" rtl="0">
+        <a:defRPr kern="1200" sz="1350">
           <a:solidFill>
             <a:schemeClr val="tx1"/>
           </a:solidFill>
@@ -3059,8 +3055,8 @@
           <a:cs typeface="+mn-cs"/>
         </a:defRPr>
       </a:lvl6pPr>
-      <a:lvl7pPr marL="2743200" algn="l" defTabSz="457200" rtl="0" eaLnBrk="1" latinLnBrk="0" hangingPunct="1">
-        <a:defRPr sz="1800" kern="1200">
+      <a:lvl7pPr algn="l" defTabSz="342900" eaLnBrk="1" hangingPunct="1" latinLnBrk="0" marL="2057400" rtl="0">
+        <a:defRPr kern="1200" sz="1350">
           <a:solidFill>
             <a:schemeClr val="tx1"/>
           </a:solidFill>
@@ -3069,8 +3065,8 @@
           <a:cs typeface="+mn-cs"/>
         </a:defRPr>
       </a:lvl7pPr>
-      <a:lvl8pPr marL="3200400" algn="l" defTabSz="457200" rtl="0" eaLnBrk="1" latinLnBrk="0" hangingPunct="1">
-        <a:defRPr sz="1800" kern="1200">
+      <a:lvl8pPr algn="l" defTabSz="342900" eaLnBrk="1" hangingPunct="1" latinLnBrk="0" marL="2400300" rtl="0">
+        <a:defRPr kern="1200" sz="1350">
           <a:solidFill>
             <a:schemeClr val="tx1"/>
           </a:solidFill>
@@ -3079,8 +3075,8 @@
           <a:cs typeface="+mn-cs"/>
         </a:defRPr>
       </a:lvl8pPr>
-      <a:lvl9pPr marL="3657600" algn="l" defTabSz="457200" rtl="0" eaLnBrk="1" latinLnBrk="0" hangingPunct="1">
-        <a:defRPr sz="1800" kern="1200">
+      <a:lvl9pPr algn="l" defTabSz="342900" eaLnBrk="1" hangingPunct="1" latinLnBrk="0" marL="2743200" rtl="0">
+        <a:defRPr kern="1200" sz="1350">
           <a:solidFill>
             <a:schemeClr val="tx1"/>
           </a:solidFill>
@@ -3095,7 +3091,7 @@
 </file>
 
 <file path=ppt/slides/slide1.xml><?xml version="1.0" encoding="utf-8"?>
-<p:sld xmlns:a="http://schemas.openxmlformats.org/drawingml/2006/main" xmlns:p="http://schemas.openxmlformats.org/presentationml/2006/main" xmlns:r="http://schemas.openxmlformats.org/officeDocument/2006/relationships">
+<p:sld xmlns:a="http://schemas.openxmlformats.org/drawingml/2006/main" xmlns:r="http://schemas.openxmlformats.org/officeDocument/2006/relationships" xmlns:p="http://schemas.openxmlformats.org/presentationml/2006/main">
   <p:cSld>
     <p:spTree>
       <p:nvGrpSpPr>
@@ -3103,12 +3099,69 @@
         <p:cNvGrpSpPr/>
         <p:nvPr/>
       </p:nvGrpSpPr>
-      <p:grpSpPr/>
+      <p:grpSpPr>
+        <a:xfrm>
+          <a:off x="0" y="0"/>
+          <a:ext cx="0" cy="0"/>
+          <a:chOff x="0" y="0"/>
+          <a:chExt cx="0" cy="0"/>
+        </a:xfrm>
+      </p:grpSpPr>
+      <p:sp>
+        <p:nvSpPr>
+          <p:cNvPr id="3" name="Subtitle 2"/>
+          <p:cNvSpPr>
+            <a:spLocks noGrp="1"/>
+          </p:cNvSpPr>
+          <p:nvPr>
+            <p:ph idx="1" type="subTitle"/>
+          </p:nvPr>
+        </p:nvSpPr>
+        <p:spPr>
+          <a:xfrm>
+            <a:off x="0" y="0"/>
+            <a:ext cx="12192000" cy="6858000"/>
+          </a:xfrm>
+        </p:spPr>
+        <p:txBody>
+          <a:bodyPr/>
+          <a:lstStyle/>
+          <a:p>
+            <a:pPr lvl="0" indent="0" marL="0">
+              <a:buNone/>
+            </a:pPr>
+            <a:br/>
+            <a:br/>
+          </a:p>
+        </p:txBody>
+      </p:sp>
+    </p:spTree>
+  </p:cSld>
+</p:sld>
+</file>
+
+<file path=ppt/slides/slide10.xml><?xml version="1.0" encoding="utf-8"?>
+<p:sld xmlns:a="http://schemas.openxmlformats.org/drawingml/2006/main" xmlns:r="http://schemas.openxmlformats.org/officeDocument/2006/relationships" xmlns:p="http://schemas.openxmlformats.org/presentationml/2006/main">
+  <p:cSld>
+    <p:spTree>
+      <p:nvGrpSpPr>
+        <p:cNvPr id="1" name=""/>
+        <p:cNvGrpSpPr/>
+        <p:nvPr/>
+      </p:nvGrpSpPr>
+      <p:grpSpPr>
+        <a:xfrm>
+          <a:off x="0" y="0"/>
+          <a:ext cx="0" cy="0"/>
+          <a:chOff x="0" y="0"/>
+          <a:chExt cx="0" cy="0"/>
+        </a:xfrm>
+      </p:grpSpPr>
       <p:pic>
         <p:nvPicPr>
-          <p:cNvPr id="2" name="Picture 1" descr="slide-01.png"/>
+          <p:cNvPr descr="slide-09.jpg" id="0" name="Picture 1"/>
           <p:cNvPicPr>
-            <a:picLocks noChangeAspect="1"/>
+            <a:picLocks noGrp="1" noChangeAspect="1"/>
           </p:cNvPicPr>
           <p:nvPr/>
         </p:nvPicPr>
@@ -3118,26 +3171,29 @@
             <a:fillRect/>
           </a:stretch>
         </p:blipFill>
-        <p:spPr>
+        <p:spPr bwMode="auto">
           <a:xfrm>
             <a:off x="0" y="0"/>
-            <a:ext cx="12191695" cy="6858000"/>
+            <a:ext cx="12192000" cy="6858000"/>
           </a:xfrm>
           <a:prstGeom prst="rect">
             <a:avLst/>
           </a:prstGeom>
+          <a:noFill/>
+          <a:ln w="9525">
+            <a:noFill/>
+            <a:headEnd/>
+            <a:tailEnd/>
+          </a:ln>
         </p:spPr>
       </p:pic>
     </p:spTree>
   </p:cSld>
-  <p:clrMapOvr>
-    <a:masterClrMapping/>
-  </p:clrMapOvr>
 </p:sld>
 </file>
 
-<file path=ppt/slides/slide10.xml><?xml version="1.0" encoding="utf-8"?>
-<p:sld xmlns:a="http://schemas.openxmlformats.org/drawingml/2006/main" xmlns:p="http://schemas.openxmlformats.org/presentationml/2006/main" xmlns:r="http://schemas.openxmlformats.org/officeDocument/2006/relationships">
+<file path=ppt/slides/slide11.xml><?xml version="1.0" encoding="utf-8"?>
+<p:sld xmlns:a="http://schemas.openxmlformats.org/drawingml/2006/main" xmlns:r="http://schemas.openxmlformats.org/officeDocument/2006/relationships" xmlns:p="http://schemas.openxmlformats.org/presentationml/2006/main">
   <p:cSld>
     <p:spTree>
       <p:nvGrpSpPr>
@@ -3145,12 +3201,19 @@
         <p:cNvGrpSpPr/>
         <p:nvPr/>
       </p:nvGrpSpPr>
-      <p:grpSpPr/>
+      <p:grpSpPr>
+        <a:xfrm>
+          <a:off x="0" y="0"/>
+          <a:ext cx="0" cy="0"/>
+          <a:chOff x="0" y="0"/>
+          <a:chExt cx="0" cy="0"/>
+        </a:xfrm>
+      </p:grpSpPr>
       <p:pic>
         <p:nvPicPr>
-          <p:cNvPr id="2" name="Picture 1" descr="slide-10.png"/>
+          <p:cNvPr descr="slide-10.jpg" id="0" name="Picture 1"/>
           <p:cNvPicPr>
-            <a:picLocks noChangeAspect="1"/>
+            <a:picLocks noGrp="1" noChangeAspect="1"/>
           </p:cNvPicPr>
           <p:nvPr/>
         </p:nvPicPr>
@@ -3160,26 +3223,29 @@
             <a:fillRect/>
           </a:stretch>
         </p:blipFill>
-        <p:spPr>
+        <p:spPr bwMode="auto">
           <a:xfrm>
             <a:off x="0" y="0"/>
-            <a:ext cx="12191695" cy="6858000"/>
+            <a:ext cx="12192000" cy="6858000"/>
           </a:xfrm>
           <a:prstGeom prst="rect">
             <a:avLst/>
           </a:prstGeom>
+          <a:noFill/>
+          <a:ln w="9525">
+            <a:noFill/>
+            <a:headEnd/>
+            <a:tailEnd/>
+          </a:ln>
         </p:spPr>
       </p:pic>
     </p:spTree>
   </p:cSld>
-  <p:clrMapOvr>
-    <a:masterClrMapping/>
-  </p:clrMapOvr>
 </p:sld>
 </file>
 
-<file path=ppt/slides/slide11.xml><?xml version="1.0" encoding="utf-8"?>
-<p:sld xmlns:a="http://schemas.openxmlformats.org/drawingml/2006/main" xmlns:p="http://schemas.openxmlformats.org/presentationml/2006/main" xmlns:r="http://schemas.openxmlformats.org/officeDocument/2006/relationships">
+<file path=ppt/slides/slide12.xml><?xml version="1.0" encoding="utf-8"?>
+<p:sld xmlns:a="http://schemas.openxmlformats.org/drawingml/2006/main" xmlns:r="http://schemas.openxmlformats.org/officeDocument/2006/relationships" xmlns:p="http://schemas.openxmlformats.org/presentationml/2006/main">
   <p:cSld>
     <p:spTree>
       <p:nvGrpSpPr>
@@ -3187,12 +3253,19 @@
         <p:cNvGrpSpPr/>
         <p:nvPr/>
       </p:nvGrpSpPr>
-      <p:grpSpPr/>
+      <p:grpSpPr>
+        <a:xfrm>
+          <a:off x="0" y="0"/>
+          <a:ext cx="0" cy="0"/>
+          <a:chOff x="0" y="0"/>
+          <a:chExt cx="0" cy="0"/>
+        </a:xfrm>
+      </p:grpSpPr>
       <p:pic>
         <p:nvPicPr>
-          <p:cNvPr id="2" name="Picture 1" descr="slide-11.png"/>
+          <p:cNvPr descr="slide-11.jpg" id="0" name="Picture 1"/>
           <p:cNvPicPr>
-            <a:picLocks noChangeAspect="1"/>
+            <a:picLocks noGrp="1" noChangeAspect="1"/>
           </p:cNvPicPr>
           <p:nvPr/>
         </p:nvPicPr>
@@ -3202,26 +3275,29 @@
             <a:fillRect/>
           </a:stretch>
         </p:blipFill>
-        <p:spPr>
+        <p:spPr bwMode="auto">
           <a:xfrm>
             <a:off x="0" y="0"/>
-            <a:ext cx="12191695" cy="6858000"/>
+            <a:ext cx="12192000" cy="6858000"/>
           </a:xfrm>
           <a:prstGeom prst="rect">
             <a:avLst/>
           </a:prstGeom>
+          <a:noFill/>
+          <a:ln w="9525">
+            <a:noFill/>
+            <a:headEnd/>
+            <a:tailEnd/>
+          </a:ln>
         </p:spPr>
       </p:pic>
     </p:spTree>
   </p:cSld>
-  <p:clrMapOvr>
-    <a:masterClrMapping/>
-  </p:clrMapOvr>
 </p:sld>
 </file>
 
-<file path=ppt/slides/slide12.xml><?xml version="1.0" encoding="utf-8"?>
-<p:sld xmlns:a="http://schemas.openxmlformats.org/drawingml/2006/main" xmlns:p="http://schemas.openxmlformats.org/presentationml/2006/main" xmlns:r="http://schemas.openxmlformats.org/officeDocument/2006/relationships">
+<file path=ppt/slides/slide13.xml><?xml version="1.0" encoding="utf-8"?>
+<p:sld xmlns:a="http://schemas.openxmlformats.org/drawingml/2006/main" xmlns:r="http://schemas.openxmlformats.org/officeDocument/2006/relationships" xmlns:p="http://schemas.openxmlformats.org/presentationml/2006/main">
   <p:cSld>
     <p:spTree>
       <p:nvGrpSpPr>
@@ -3229,12 +3305,19 @@
         <p:cNvGrpSpPr/>
         <p:nvPr/>
       </p:nvGrpSpPr>
-      <p:grpSpPr/>
+      <p:grpSpPr>
+        <a:xfrm>
+          <a:off x="0" y="0"/>
+          <a:ext cx="0" cy="0"/>
+          <a:chOff x="0" y="0"/>
+          <a:chExt cx="0" cy="0"/>
+        </a:xfrm>
+      </p:grpSpPr>
       <p:pic>
         <p:nvPicPr>
-          <p:cNvPr id="2" name="Picture 1" descr="slide-12.png"/>
+          <p:cNvPr descr="slide-12.jpg" id="0" name="Picture 1"/>
           <p:cNvPicPr>
-            <a:picLocks noChangeAspect="1"/>
+            <a:picLocks noGrp="1" noChangeAspect="1"/>
           </p:cNvPicPr>
           <p:nvPr/>
         </p:nvPicPr>
@@ -3244,26 +3327,29 @@
             <a:fillRect/>
           </a:stretch>
         </p:blipFill>
-        <p:spPr>
+        <p:spPr bwMode="auto">
           <a:xfrm>
             <a:off x="0" y="0"/>
-            <a:ext cx="12191695" cy="6858000"/>
+            <a:ext cx="12192000" cy="6858000"/>
           </a:xfrm>
           <a:prstGeom prst="rect">
             <a:avLst/>
           </a:prstGeom>
+          <a:noFill/>
+          <a:ln w="9525">
+            <a:noFill/>
+            <a:headEnd/>
+            <a:tailEnd/>
+          </a:ln>
         </p:spPr>
       </p:pic>
     </p:spTree>
   </p:cSld>
-  <p:clrMapOvr>
-    <a:masterClrMapping/>
-  </p:clrMapOvr>
 </p:sld>
 </file>
 
-<file path=ppt/slides/slide13.xml><?xml version="1.0" encoding="utf-8"?>
-<p:sld xmlns:a="http://schemas.openxmlformats.org/drawingml/2006/main" xmlns:p="http://schemas.openxmlformats.org/presentationml/2006/main" xmlns:r="http://schemas.openxmlformats.org/officeDocument/2006/relationships">
+<file path=ppt/slides/slide14.xml><?xml version="1.0" encoding="utf-8"?>
+<p:sld xmlns:a="http://schemas.openxmlformats.org/drawingml/2006/main" xmlns:r="http://schemas.openxmlformats.org/officeDocument/2006/relationships" xmlns:p="http://schemas.openxmlformats.org/presentationml/2006/main">
   <p:cSld>
     <p:spTree>
       <p:nvGrpSpPr>
@@ -3271,12 +3357,19 @@
         <p:cNvGrpSpPr/>
         <p:nvPr/>
       </p:nvGrpSpPr>
-      <p:grpSpPr/>
+      <p:grpSpPr>
+        <a:xfrm>
+          <a:off x="0" y="0"/>
+          <a:ext cx="0" cy="0"/>
+          <a:chOff x="0" y="0"/>
+          <a:chExt cx="0" cy="0"/>
+        </a:xfrm>
+      </p:grpSpPr>
       <p:pic>
         <p:nvPicPr>
-          <p:cNvPr id="2" name="Picture 1" descr="slide-13.png"/>
+          <p:cNvPr descr="slide-13.jpg" id="0" name="Picture 1"/>
           <p:cNvPicPr>
-            <a:picLocks noChangeAspect="1"/>
+            <a:picLocks noGrp="1" noChangeAspect="1"/>
           </p:cNvPicPr>
           <p:nvPr/>
         </p:nvPicPr>
@@ -3286,26 +3379,29 @@
             <a:fillRect/>
           </a:stretch>
         </p:blipFill>
-        <p:spPr>
+        <p:spPr bwMode="auto">
           <a:xfrm>
             <a:off x="0" y="0"/>
-            <a:ext cx="12191695" cy="6858000"/>
+            <a:ext cx="12192000" cy="6858000"/>
           </a:xfrm>
           <a:prstGeom prst="rect">
             <a:avLst/>
           </a:prstGeom>
+          <a:noFill/>
+          <a:ln w="9525">
+            <a:noFill/>
+            <a:headEnd/>
+            <a:tailEnd/>
+          </a:ln>
         </p:spPr>
       </p:pic>
     </p:spTree>
   </p:cSld>
-  <p:clrMapOvr>
-    <a:masterClrMapping/>
-  </p:clrMapOvr>
 </p:sld>
 </file>
 
-<file path=ppt/slides/slide14.xml><?xml version="1.0" encoding="utf-8"?>
-<p:sld xmlns:a="http://schemas.openxmlformats.org/drawingml/2006/main" xmlns:p="http://schemas.openxmlformats.org/presentationml/2006/main" xmlns:r="http://schemas.openxmlformats.org/officeDocument/2006/relationships">
+<file path=ppt/slides/slide15.xml><?xml version="1.0" encoding="utf-8"?>
+<p:sld xmlns:a="http://schemas.openxmlformats.org/drawingml/2006/main" xmlns:r="http://schemas.openxmlformats.org/officeDocument/2006/relationships" xmlns:p="http://schemas.openxmlformats.org/presentationml/2006/main">
   <p:cSld>
     <p:spTree>
       <p:nvGrpSpPr>
@@ -3313,12 +3409,19 @@
         <p:cNvGrpSpPr/>
         <p:nvPr/>
       </p:nvGrpSpPr>
-      <p:grpSpPr/>
+      <p:grpSpPr>
+        <a:xfrm>
+          <a:off x="0" y="0"/>
+          <a:ext cx="0" cy="0"/>
+          <a:chOff x="0" y="0"/>
+          <a:chExt cx="0" cy="0"/>
+        </a:xfrm>
+      </p:grpSpPr>
       <p:pic>
         <p:nvPicPr>
-          <p:cNvPr id="2" name="Picture 1" descr="slide-14.png"/>
+          <p:cNvPr descr="slide-14.jpg" id="0" name="Picture 1"/>
           <p:cNvPicPr>
-            <a:picLocks noChangeAspect="1"/>
+            <a:picLocks noGrp="1" noChangeAspect="1"/>
           </p:cNvPicPr>
           <p:nvPr/>
         </p:nvPicPr>
@@ -3328,26 +3431,29 @@
             <a:fillRect/>
           </a:stretch>
         </p:blipFill>
-        <p:spPr>
+        <p:spPr bwMode="auto">
           <a:xfrm>
             <a:off x="0" y="0"/>
-            <a:ext cx="12191695" cy="6858000"/>
+            <a:ext cx="12192000" cy="6858000"/>
           </a:xfrm>
           <a:prstGeom prst="rect">
             <a:avLst/>
           </a:prstGeom>
+          <a:noFill/>
+          <a:ln w="9525">
+            <a:noFill/>
+            <a:headEnd/>
+            <a:tailEnd/>
+          </a:ln>
         </p:spPr>
       </p:pic>
     </p:spTree>
   </p:cSld>
-  <p:clrMapOvr>
-    <a:masterClrMapping/>
-  </p:clrMapOvr>
 </p:sld>
 </file>
 
-<file path=ppt/slides/slide15.xml><?xml version="1.0" encoding="utf-8"?>
-<p:sld xmlns:a="http://schemas.openxmlformats.org/drawingml/2006/main" xmlns:p="http://schemas.openxmlformats.org/presentationml/2006/main" xmlns:r="http://schemas.openxmlformats.org/officeDocument/2006/relationships">
+<file path=ppt/slides/slide16.xml><?xml version="1.0" encoding="utf-8"?>
+<p:sld xmlns:a="http://schemas.openxmlformats.org/drawingml/2006/main" xmlns:r="http://schemas.openxmlformats.org/officeDocument/2006/relationships" xmlns:p="http://schemas.openxmlformats.org/presentationml/2006/main">
   <p:cSld>
     <p:spTree>
       <p:nvGrpSpPr>
@@ -3355,12 +3461,19 @@
         <p:cNvGrpSpPr/>
         <p:nvPr/>
       </p:nvGrpSpPr>
-      <p:grpSpPr/>
+      <p:grpSpPr>
+        <a:xfrm>
+          <a:off x="0" y="0"/>
+          <a:ext cx="0" cy="0"/>
+          <a:chOff x="0" y="0"/>
+          <a:chExt cx="0" cy="0"/>
+        </a:xfrm>
+      </p:grpSpPr>
       <p:pic>
         <p:nvPicPr>
-          <p:cNvPr id="2" name="Picture 1" descr="slide-15.png"/>
+          <p:cNvPr descr="slide-15.jpg" id="0" name="Picture 1"/>
           <p:cNvPicPr>
-            <a:picLocks noChangeAspect="1"/>
+            <a:picLocks noGrp="1" noChangeAspect="1"/>
           </p:cNvPicPr>
           <p:nvPr/>
         </p:nvPicPr>
@@ -3370,26 +3483,29 @@
             <a:fillRect/>
           </a:stretch>
         </p:blipFill>
-        <p:spPr>
+        <p:spPr bwMode="auto">
           <a:xfrm>
             <a:off x="0" y="0"/>
-            <a:ext cx="12191695" cy="6858000"/>
+            <a:ext cx="12192000" cy="6858000"/>
           </a:xfrm>
           <a:prstGeom prst="rect">
             <a:avLst/>
           </a:prstGeom>
+          <a:noFill/>
+          <a:ln w="9525">
+            <a:noFill/>
+            <a:headEnd/>
+            <a:tailEnd/>
+          </a:ln>
         </p:spPr>
       </p:pic>
     </p:spTree>
   </p:cSld>
-  <p:clrMapOvr>
-    <a:masterClrMapping/>
-  </p:clrMapOvr>
 </p:sld>
 </file>
 
-<file path=ppt/slides/slide16.xml><?xml version="1.0" encoding="utf-8"?>
-<p:sld xmlns:a="http://schemas.openxmlformats.org/drawingml/2006/main" xmlns:p="http://schemas.openxmlformats.org/presentationml/2006/main" xmlns:r="http://schemas.openxmlformats.org/officeDocument/2006/relationships">
+<file path=ppt/slides/slide17.xml><?xml version="1.0" encoding="utf-8"?>
+<p:sld xmlns:a="http://schemas.openxmlformats.org/drawingml/2006/main" xmlns:r="http://schemas.openxmlformats.org/officeDocument/2006/relationships" xmlns:p="http://schemas.openxmlformats.org/presentationml/2006/main">
   <p:cSld>
     <p:spTree>
       <p:nvGrpSpPr>
@@ -3397,12 +3513,19 @@
         <p:cNvGrpSpPr/>
         <p:nvPr/>
       </p:nvGrpSpPr>
-      <p:grpSpPr/>
+      <p:grpSpPr>
+        <a:xfrm>
+          <a:off x="0" y="0"/>
+          <a:ext cx="0" cy="0"/>
+          <a:chOff x="0" y="0"/>
+          <a:chExt cx="0" cy="0"/>
+        </a:xfrm>
+      </p:grpSpPr>
       <p:pic>
         <p:nvPicPr>
-          <p:cNvPr id="2" name="Picture 1" descr="slide-16.png"/>
+          <p:cNvPr descr="slide-16.jpg" id="0" name="Picture 1"/>
           <p:cNvPicPr>
-            <a:picLocks noChangeAspect="1"/>
+            <a:picLocks noGrp="1" noChangeAspect="1"/>
           </p:cNvPicPr>
           <p:nvPr/>
         </p:nvPicPr>
@@ -3412,26 +3535,29 @@
             <a:fillRect/>
           </a:stretch>
         </p:blipFill>
-        <p:spPr>
+        <p:spPr bwMode="auto">
           <a:xfrm>
             <a:off x="0" y="0"/>
-            <a:ext cx="12191695" cy="6858000"/>
+            <a:ext cx="12192000" cy="6858000"/>
           </a:xfrm>
           <a:prstGeom prst="rect">
             <a:avLst/>
           </a:prstGeom>
+          <a:noFill/>
+          <a:ln w="9525">
+            <a:noFill/>
+            <a:headEnd/>
+            <a:tailEnd/>
+          </a:ln>
         </p:spPr>
       </p:pic>
     </p:spTree>
   </p:cSld>
-  <p:clrMapOvr>
-    <a:masterClrMapping/>
-  </p:clrMapOvr>
 </p:sld>
 </file>
 
-<file path=ppt/slides/slide17.xml><?xml version="1.0" encoding="utf-8"?>
-<p:sld xmlns:a="http://schemas.openxmlformats.org/drawingml/2006/main" xmlns:p="http://schemas.openxmlformats.org/presentationml/2006/main" xmlns:r="http://schemas.openxmlformats.org/officeDocument/2006/relationships">
+<file path=ppt/slides/slide18.xml><?xml version="1.0" encoding="utf-8"?>
+<p:sld xmlns:a="http://schemas.openxmlformats.org/drawingml/2006/main" xmlns:r="http://schemas.openxmlformats.org/officeDocument/2006/relationships" xmlns:p="http://schemas.openxmlformats.org/presentationml/2006/main">
   <p:cSld>
     <p:spTree>
       <p:nvGrpSpPr>
@@ -3439,12 +3565,19 @@
         <p:cNvGrpSpPr/>
         <p:nvPr/>
       </p:nvGrpSpPr>
-      <p:grpSpPr/>
+      <p:grpSpPr>
+        <a:xfrm>
+          <a:off x="0" y="0"/>
+          <a:ext cx="0" cy="0"/>
+          <a:chOff x="0" y="0"/>
+          <a:chExt cx="0" cy="0"/>
+        </a:xfrm>
+      </p:grpSpPr>
       <p:pic>
         <p:nvPicPr>
-          <p:cNvPr id="2" name="Picture 1" descr="slide-17.png"/>
+          <p:cNvPr descr="slide-17.jpg" id="0" name="Picture 1"/>
           <p:cNvPicPr>
-            <a:picLocks noChangeAspect="1"/>
+            <a:picLocks noGrp="1" noChangeAspect="1"/>
           </p:cNvPicPr>
           <p:nvPr/>
         </p:nvPicPr>
@@ -3454,26 +3587,29 @@
             <a:fillRect/>
           </a:stretch>
         </p:blipFill>
-        <p:spPr>
+        <p:spPr bwMode="auto">
           <a:xfrm>
             <a:off x="0" y="0"/>
-            <a:ext cx="12191695" cy="6858000"/>
+            <a:ext cx="12192000" cy="6858000"/>
           </a:xfrm>
           <a:prstGeom prst="rect">
             <a:avLst/>
           </a:prstGeom>
+          <a:noFill/>
+          <a:ln w="9525">
+            <a:noFill/>
+            <a:headEnd/>
+            <a:tailEnd/>
+          </a:ln>
         </p:spPr>
       </p:pic>
     </p:spTree>
   </p:cSld>
-  <p:clrMapOvr>
-    <a:masterClrMapping/>
-  </p:clrMapOvr>
 </p:sld>
 </file>
 
 <file path=ppt/slides/slide2.xml><?xml version="1.0" encoding="utf-8"?>
-<p:sld xmlns:a="http://schemas.openxmlformats.org/drawingml/2006/main" xmlns:p="http://schemas.openxmlformats.org/presentationml/2006/main" xmlns:r="http://schemas.openxmlformats.org/officeDocument/2006/relationships">
+<p:sld xmlns:a="http://schemas.openxmlformats.org/drawingml/2006/main" xmlns:r="http://schemas.openxmlformats.org/officeDocument/2006/relationships" xmlns:p="http://schemas.openxmlformats.org/presentationml/2006/main">
   <p:cSld>
     <p:spTree>
       <p:nvGrpSpPr>
@@ -3481,12 +3617,19 @@
         <p:cNvGrpSpPr/>
         <p:nvPr/>
       </p:nvGrpSpPr>
-      <p:grpSpPr/>
+      <p:grpSpPr>
+        <a:xfrm>
+          <a:off x="0" y="0"/>
+          <a:ext cx="0" cy="0"/>
+          <a:chOff x="0" y="0"/>
+          <a:chExt cx="0" cy="0"/>
+        </a:xfrm>
+      </p:grpSpPr>
       <p:pic>
         <p:nvPicPr>
-          <p:cNvPr id="2" name="Picture 1" descr="slide-02.png"/>
+          <p:cNvPr descr="slide-01.jpg" id="0" name="Picture 1"/>
           <p:cNvPicPr>
-            <a:picLocks noChangeAspect="1"/>
+            <a:picLocks noGrp="1" noChangeAspect="1"/>
           </p:cNvPicPr>
           <p:nvPr/>
         </p:nvPicPr>
@@ -3496,26 +3639,29 @@
             <a:fillRect/>
           </a:stretch>
         </p:blipFill>
-        <p:spPr>
+        <p:spPr bwMode="auto">
           <a:xfrm>
             <a:off x="0" y="0"/>
-            <a:ext cx="12191695" cy="6858000"/>
+            <a:ext cx="12192000" cy="6858000"/>
           </a:xfrm>
           <a:prstGeom prst="rect">
             <a:avLst/>
           </a:prstGeom>
+          <a:noFill/>
+          <a:ln w="9525">
+            <a:noFill/>
+            <a:headEnd/>
+            <a:tailEnd/>
+          </a:ln>
         </p:spPr>
       </p:pic>
     </p:spTree>
   </p:cSld>
-  <p:clrMapOvr>
-    <a:masterClrMapping/>
-  </p:clrMapOvr>
 </p:sld>
 </file>
 
 <file path=ppt/slides/slide3.xml><?xml version="1.0" encoding="utf-8"?>
-<p:sld xmlns:a="http://schemas.openxmlformats.org/drawingml/2006/main" xmlns:p="http://schemas.openxmlformats.org/presentationml/2006/main" xmlns:r="http://schemas.openxmlformats.org/officeDocument/2006/relationships">
+<p:sld xmlns:a="http://schemas.openxmlformats.org/drawingml/2006/main" xmlns:r="http://schemas.openxmlformats.org/officeDocument/2006/relationships" xmlns:p="http://schemas.openxmlformats.org/presentationml/2006/main">
   <p:cSld>
     <p:spTree>
       <p:nvGrpSpPr>
@@ -3523,12 +3669,19 @@
         <p:cNvGrpSpPr/>
         <p:nvPr/>
       </p:nvGrpSpPr>
-      <p:grpSpPr/>
+      <p:grpSpPr>
+        <a:xfrm>
+          <a:off x="0" y="0"/>
+          <a:ext cx="0" cy="0"/>
+          <a:chOff x="0" y="0"/>
+          <a:chExt cx="0" cy="0"/>
+        </a:xfrm>
+      </p:grpSpPr>
       <p:pic>
         <p:nvPicPr>
-          <p:cNvPr id="2" name="Picture 1" descr="slide-03.png"/>
+          <p:cNvPr descr="slide-02.jpg" id="0" name="Picture 1"/>
           <p:cNvPicPr>
-            <a:picLocks noChangeAspect="1"/>
+            <a:picLocks noGrp="1" noChangeAspect="1"/>
           </p:cNvPicPr>
           <p:nvPr/>
         </p:nvPicPr>
@@ -3538,26 +3691,29 @@
             <a:fillRect/>
           </a:stretch>
         </p:blipFill>
-        <p:spPr>
+        <p:spPr bwMode="auto">
           <a:xfrm>
             <a:off x="0" y="0"/>
-            <a:ext cx="12191695" cy="6858000"/>
+            <a:ext cx="12192000" cy="6858000"/>
           </a:xfrm>
           <a:prstGeom prst="rect">
             <a:avLst/>
           </a:prstGeom>
+          <a:noFill/>
+          <a:ln w="9525">
+            <a:noFill/>
+            <a:headEnd/>
+            <a:tailEnd/>
+          </a:ln>
         </p:spPr>
       </p:pic>
     </p:spTree>
   </p:cSld>
-  <p:clrMapOvr>
-    <a:masterClrMapping/>
-  </p:clrMapOvr>
 </p:sld>
 </file>
 
 <file path=ppt/slides/slide4.xml><?xml version="1.0" encoding="utf-8"?>
-<p:sld xmlns:a="http://schemas.openxmlformats.org/drawingml/2006/main" xmlns:p="http://schemas.openxmlformats.org/presentationml/2006/main" xmlns:r="http://schemas.openxmlformats.org/officeDocument/2006/relationships">
+<p:sld xmlns:a="http://schemas.openxmlformats.org/drawingml/2006/main" xmlns:r="http://schemas.openxmlformats.org/officeDocument/2006/relationships" xmlns:p="http://schemas.openxmlformats.org/presentationml/2006/main">
   <p:cSld>
     <p:spTree>
       <p:nvGrpSpPr>
@@ -3565,12 +3721,19 @@
         <p:cNvGrpSpPr/>
         <p:nvPr/>
       </p:nvGrpSpPr>
-      <p:grpSpPr/>
+      <p:grpSpPr>
+        <a:xfrm>
+          <a:off x="0" y="0"/>
+          <a:ext cx="0" cy="0"/>
+          <a:chOff x="0" y="0"/>
+          <a:chExt cx="0" cy="0"/>
+        </a:xfrm>
+      </p:grpSpPr>
       <p:pic>
         <p:nvPicPr>
-          <p:cNvPr id="2" name="Picture 1" descr="slide-04.png"/>
+          <p:cNvPr descr="slide-03.jpg" id="0" name="Picture 1"/>
           <p:cNvPicPr>
-            <a:picLocks noChangeAspect="1"/>
+            <a:picLocks noGrp="1" noChangeAspect="1"/>
           </p:cNvPicPr>
           <p:nvPr/>
         </p:nvPicPr>
@@ -3580,26 +3743,29 @@
             <a:fillRect/>
           </a:stretch>
         </p:blipFill>
-        <p:spPr>
+        <p:spPr bwMode="auto">
           <a:xfrm>
             <a:off x="0" y="0"/>
-            <a:ext cx="12191695" cy="6858000"/>
+            <a:ext cx="12192000" cy="6858000"/>
           </a:xfrm>
           <a:prstGeom prst="rect">
             <a:avLst/>
           </a:prstGeom>
+          <a:noFill/>
+          <a:ln w="9525">
+            <a:noFill/>
+            <a:headEnd/>
+            <a:tailEnd/>
+          </a:ln>
         </p:spPr>
       </p:pic>
     </p:spTree>
   </p:cSld>
-  <p:clrMapOvr>
-    <a:masterClrMapping/>
-  </p:clrMapOvr>
 </p:sld>
 </file>
 
 <file path=ppt/slides/slide5.xml><?xml version="1.0" encoding="utf-8"?>
-<p:sld xmlns:a="http://schemas.openxmlformats.org/drawingml/2006/main" xmlns:p="http://schemas.openxmlformats.org/presentationml/2006/main" xmlns:r="http://schemas.openxmlformats.org/officeDocument/2006/relationships">
+<p:sld xmlns:a="http://schemas.openxmlformats.org/drawingml/2006/main" xmlns:r="http://schemas.openxmlformats.org/officeDocument/2006/relationships" xmlns:p="http://schemas.openxmlformats.org/presentationml/2006/main">
   <p:cSld>
     <p:spTree>
       <p:nvGrpSpPr>
@@ -3607,12 +3773,19 @@
         <p:cNvGrpSpPr/>
         <p:nvPr/>
       </p:nvGrpSpPr>
-      <p:grpSpPr/>
+      <p:grpSpPr>
+        <a:xfrm>
+          <a:off x="0" y="0"/>
+          <a:ext cx="0" cy="0"/>
+          <a:chOff x="0" y="0"/>
+          <a:chExt cx="0" cy="0"/>
+        </a:xfrm>
+      </p:grpSpPr>
       <p:pic>
         <p:nvPicPr>
-          <p:cNvPr id="2" name="Picture 1" descr="slide-05.png"/>
+          <p:cNvPr descr="slide-04.jpg" id="0" name="Picture 1"/>
           <p:cNvPicPr>
-            <a:picLocks noChangeAspect="1"/>
+            <a:picLocks noGrp="1" noChangeAspect="1"/>
           </p:cNvPicPr>
           <p:nvPr/>
         </p:nvPicPr>
@@ -3622,26 +3795,29 @@
             <a:fillRect/>
           </a:stretch>
         </p:blipFill>
-        <p:spPr>
+        <p:spPr bwMode="auto">
           <a:xfrm>
             <a:off x="0" y="0"/>
-            <a:ext cx="12191695" cy="6858000"/>
+            <a:ext cx="12192000" cy="6858000"/>
           </a:xfrm>
           <a:prstGeom prst="rect">
             <a:avLst/>
           </a:prstGeom>
+          <a:noFill/>
+          <a:ln w="9525">
+            <a:noFill/>
+            <a:headEnd/>
+            <a:tailEnd/>
+          </a:ln>
         </p:spPr>
       </p:pic>
     </p:spTree>
   </p:cSld>
-  <p:clrMapOvr>
-    <a:masterClrMapping/>
-  </p:clrMapOvr>
 </p:sld>
 </file>
 
 <file path=ppt/slides/slide6.xml><?xml version="1.0" encoding="utf-8"?>
-<p:sld xmlns:a="http://schemas.openxmlformats.org/drawingml/2006/main" xmlns:p="http://schemas.openxmlformats.org/presentationml/2006/main" xmlns:r="http://schemas.openxmlformats.org/officeDocument/2006/relationships">
+<p:sld xmlns:a="http://schemas.openxmlformats.org/drawingml/2006/main" xmlns:r="http://schemas.openxmlformats.org/officeDocument/2006/relationships" xmlns:p="http://schemas.openxmlformats.org/presentationml/2006/main">
   <p:cSld>
     <p:spTree>
       <p:nvGrpSpPr>
@@ -3649,12 +3825,19 @@
         <p:cNvGrpSpPr/>
         <p:nvPr/>
       </p:nvGrpSpPr>
-      <p:grpSpPr/>
+      <p:grpSpPr>
+        <a:xfrm>
+          <a:off x="0" y="0"/>
+          <a:ext cx="0" cy="0"/>
+          <a:chOff x="0" y="0"/>
+          <a:chExt cx="0" cy="0"/>
+        </a:xfrm>
+      </p:grpSpPr>
       <p:pic>
         <p:nvPicPr>
-          <p:cNvPr id="2" name="Picture 1" descr="slide-06.png"/>
+          <p:cNvPr descr="slide-05.jpg" id="0" name="Picture 1"/>
           <p:cNvPicPr>
-            <a:picLocks noChangeAspect="1"/>
+            <a:picLocks noGrp="1" noChangeAspect="1"/>
           </p:cNvPicPr>
           <p:nvPr/>
         </p:nvPicPr>
@@ -3664,26 +3847,29 @@
             <a:fillRect/>
           </a:stretch>
         </p:blipFill>
-        <p:spPr>
+        <p:spPr bwMode="auto">
           <a:xfrm>
             <a:off x="0" y="0"/>
-            <a:ext cx="12191695" cy="6858000"/>
+            <a:ext cx="12192000" cy="6858000"/>
           </a:xfrm>
           <a:prstGeom prst="rect">
             <a:avLst/>
           </a:prstGeom>
+          <a:noFill/>
+          <a:ln w="9525">
+            <a:noFill/>
+            <a:headEnd/>
+            <a:tailEnd/>
+          </a:ln>
         </p:spPr>
       </p:pic>
     </p:spTree>
   </p:cSld>
-  <p:clrMapOvr>
-    <a:masterClrMapping/>
-  </p:clrMapOvr>
 </p:sld>
 </file>
 
 <file path=ppt/slides/slide7.xml><?xml version="1.0" encoding="utf-8"?>
-<p:sld xmlns:a="http://schemas.openxmlformats.org/drawingml/2006/main" xmlns:p="http://schemas.openxmlformats.org/presentationml/2006/main" xmlns:r="http://schemas.openxmlformats.org/officeDocument/2006/relationships">
+<p:sld xmlns:a="http://schemas.openxmlformats.org/drawingml/2006/main" xmlns:r="http://schemas.openxmlformats.org/officeDocument/2006/relationships" xmlns:p="http://schemas.openxmlformats.org/presentationml/2006/main">
   <p:cSld>
     <p:spTree>
       <p:nvGrpSpPr>
@@ -3691,12 +3877,19 @@
         <p:cNvGrpSpPr/>
         <p:nvPr/>
       </p:nvGrpSpPr>
-      <p:grpSpPr/>
+      <p:grpSpPr>
+        <a:xfrm>
+          <a:off x="0" y="0"/>
+          <a:ext cx="0" cy="0"/>
+          <a:chOff x="0" y="0"/>
+          <a:chExt cx="0" cy="0"/>
+        </a:xfrm>
+      </p:grpSpPr>
       <p:pic>
         <p:nvPicPr>
-          <p:cNvPr id="2" name="Picture 1" descr="slide-07.png"/>
+          <p:cNvPr descr="slide-06.jpg" id="0" name="Picture 1"/>
           <p:cNvPicPr>
-            <a:picLocks noChangeAspect="1"/>
+            <a:picLocks noGrp="1" noChangeAspect="1"/>
           </p:cNvPicPr>
           <p:nvPr/>
         </p:nvPicPr>
@@ -3706,26 +3899,29 @@
             <a:fillRect/>
           </a:stretch>
         </p:blipFill>
-        <p:spPr>
+        <p:spPr bwMode="auto">
           <a:xfrm>
             <a:off x="0" y="0"/>
-            <a:ext cx="12191695" cy="6858000"/>
+            <a:ext cx="12192000" cy="6858000"/>
           </a:xfrm>
           <a:prstGeom prst="rect">
             <a:avLst/>
           </a:prstGeom>
+          <a:noFill/>
+          <a:ln w="9525">
+            <a:noFill/>
+            <a:headEnd/>
+            <a:tailEnd/>
+          </a:ln>
         </p:spPr>
       </p:pic>
     </p:spTree>
   </p:cSld>
-  <p:clrMapOvr>
-    <a:masterClrMapping/>
-  </p:clrMapOvr>
 </p:sld>
 </file>
 
 <file path=ppt/slides/slide8.xml><?xml version="1.0" encoding="utf-8"?>
-<p:sld xmlns:a="http://schemas.openxmlformats.org/drawingml/2006/main" xmlns:p="http://schemas.openxmlformats.org/presentationml/2006/main" xmlns:r="http://schemas.openxmlformats.org/officeDocument/2006/relationships">
+<p:sld xmlns:a="http://schemas.openxmlformats.org/drawingml/2006/main" xmlns:r="http://schemas.openxmlformats.org/officeDocument/2006/relationships" xmlns:p="http://schemas.openxmlformats.org/presentationml/2006/main">
   <p:cSld>
     <p:spTree>
       <p:nvGrpSpPr>
@@ -3733,12 +3929,19 @@
         <p:cNvGrpSpPr/>
         <p:nvPr/>
       </p:nvGrpSpPr>
-      <p:grpSpPr/>
+      <p:grpSpPr>
+        <a:xfrm>
+          <a:off x="0" y="0"/>
+          <a:ext cx="0" cy="0"/>
+          <a:chOff x="0" y="0"/>
+          <a:chExt cx="0" cy="0"/>
+        </a:xfrm>
+      </p:grpSpPr>
       <p:pic>
         <p:nvPicPr>
-          <p:cNvPr id="2" name="Picture 1" descr="slide-08.png"/>
+          <p:cNvPr descr="slide-07.jpg" id="0" name="Picture 1"/>
           <p:cNvPicPr>
-            <a:picLocks noChangeAspect="1"/>
+            <a:picLocks noGrp="1" noChangeAspect="1"/>
           </p:cNvPicPr>
           <p:nvPr/>
         </p:nvPicPr>
@@ -3748,26 +3951,29 @@
             <a:fillRect/>
           </a:stretch>
         </p:blipFill>
-        <p:spPr>
+        <p:spPr bwMode="auto">
           <a:xfrm>
             <a:off x="0" y="0"/>
-            <a:ext cx="12191695" cy="6858000"/>
+            <a:ext cx="12192000" cy="6858000"/>
           </a:xfrm>
           <a:prstGeom prst="rect">
             <a:avLst/>
           </a:prstGeom>
+          <a:noFill/>
+          <a:ln w="9525">
+            <a:noFill/>
+            <a:headEnd/>
+            <a:tailEnd/>
+          </a:ln>
         </p:spPr>
       </p:pic>
     </p:spTree>
   </p:cSld>
-  <p:clrMapOvr>
-    <a:masterClrMapping/>
-  </p:clrMapOvr>
 </p:sld>
 </file>
 
 <file path=ppt/slides/slide9.xml><?xml version="1.0" encoding="utf-8"?>
-<p:sld xmlns:a="http://schemas.openxmlformats.org/drawingml/2006/main" xmlns:p="http://schemas.openxmlformats.org/presentationml/2006/main" xmlns:r="http://schemas.openxmlformats.org/officeDocument/2006/relationships">
+<p:sld xmlns:a="http://schemas.openxmlformats.org/drawingml/2006/main" xmlns:r="http://schemas.openxmlformats.org/officeDocument/2006/relationships" xmlns:p="http://schemas.openxmlformats.org/presentationml/2006/main">
   <p:cSld>
     <p:spTree>
       <p:nvGrpSpPr>
@@ -3775,12 +3981,19 @@
         <p:cNvGrpSpPr/>
         <p:nvPr/>
       </p:nvGrpSpPr>
-      <p:grpSpPr/>
+      <p:grpSpPr>
+        <a:xfrm>
+          <a:off x="0" y="0"/>
+          <a:ext cx="0" cy="0"/>
+          <a:chOff x="0" y="0"/>
+          <a:chExt cx="0" cy="0"/>
+        </a:xfrm>
+      </p:grpSpPr>
       <p:pic>
         <p:nvPicPr>
-          <p:cNvPr id="2" name="Picture 1" descr="slide-09.png"/>
+          <p:cNvPr descr="slide-08.jpg" id="0" name="Picture 1"/>
           <p:cNvPicPr>
-            <a:picLocks noChangeAspect="1"/>
+            <a:picLocks noGrp="1" noChangeAspect="1"/>
           </p:cNvPicPr>
           <p:nvPr/>
         </p:nvPicPr>
@@ -3790,21 +4003,24 @@
             <a:fillRect/>
           </a:stretch>
         </p:blipFill>
-        <p:spPr>
+        <p:spPr bwMode="auto">
           <a:xfrm>
             <a:off x="0" y="0"/>
-            <a:ext cx="12191695" cy="6858000"/>
+            <a:ext cx="12192000" cy="6858000"/>
           </a:xfrm>
           <a:prstGeom prst="rect">
             <a:avLst/>
           </a:prstGeom>
+          <a:noFill/>
+          <a:ln w="9525">
+            <a:noFill/>
+            <a:headEnd/>
+            <a:tailEnd/>
+          </a:ln>
         </p:spPr>
       </p:pic>
     </p:spTree>
   </p:cSld>
-  <p:clrMapOvr>
-    <a:masterClrMapping/>
-  </p:clrMapOvr>
 </p:sld>
 </file>
 
@@ -4126,4 +4342,265 @@
   </a:objectDefaults>
   <a:extraClrSchemeLst/>
 </a:theme>
+</file>
+
+<file path=ppt/theme/theme2.xml><?xml version="1.0" encoding="utf-8"?>
+<a:theme xmlns:a="http://schemas.openxmlformats.org/drawingml/2006/main" name="Office Theme">
+  <a:themeElements>
+    <a:clrScheme name="Office">
+      <a:dk1>
+        <a:sysClr val="windowText" lastClr="000000"/>
+      </a:dk1>
+      <a:lt1>
+        <a:sysClr val="window" lastClr="FFFFFF"/>
+      </a:lt1>
+      <a:dk2>
+        <a:srgbClr val="44546A"/>
+      </a:dk2>
+      <a:lt2>
+        <a:srgbClr val="E7E6E6"/>
+      </a:lt2>
+      <a:accent1>
+        <a:srgbClr val="5B9BD5"/>
+      </a:accent1>
+      <a:accent2>
+        <a:srgbClr val="ED7D31"/>
+      </a:accent2>
+      <a:accent3>
+        <a:srgbClr val="A5A5A5"/>
+      </a:accent3>
+      <a:accent4>
+        <a:srgbClr val="FFC000"/>
+      </a:accent4>
+      <a:accent5>
+        <a:srgbClr val="4472C4"/>
+      </a:accent5>
+      <a:accent6>
+        <a:srgbClr val="70AD47"/>
+      </a:accent6>
+      <a:hlink>
+        <a:srgbClr val="0563C1"/>
+      </a:hlink>
+      <a:folHlink>
+        <a:srgbClr val="954F72"/>
+      </a:folHlink>
+    </a:clrScheme>
+    <a:fontScheme name="Office">
+      <a:majorFont>
+        <a:latin typeface="Calibri Light" panose="020F0302020204030204"/>
+        <a:ea typeface=""/>
+        <a:cs typeface=""/>
+        <a:font script="Jpan" typeface="ＭＳ Ｐゴシック"/>
+        <a:font script="Hang" typeface="맑은 고딕"/>
+        <a:font script="Hans" typeface="宋体"/>
+        <a:font script="Hant" typeface="新細明體"/>
+        <a:font script="Arab" typeface="Times New Roman"/>
+        <a:font script="Hebr" typeface="Times New Roman"/>
+        <a:font script="Thai" typeface="Angsana New"/>
+        <a:font script="Ethi" typeface="Nyala"/>
+        <a:font script="Beng" typeface="Vrinda"/>
+        <a:font script="Gujr" typeface="Shruti"/>
+        <a:font script="Khmr" typeface="MoolBoran"/>
+        <a:font script="Knda" typeface="Tunga"/>
+        <a:font script="Guru" typeface="Raavi"/>
+        <a:font script="Cans" typeface="Euphemia"/>
+        <a:font script="Cher" typeface="Plantagenet Cherokee"/>
+        <a:font script="Yiii" typeface="Microsoft Yi Baiti"/>
+        <a:font script="Tibt" typeface="Microsoft Himalaya"/>
+        <a:font script="Thaa" typeface="MV Boli"/>
+        <a:font script="Deva" typeface="Mangal"/>
+        <a:font script="Telu" typeface="Gautami"/>
+        <a:font script="Taml" typeface="Latha"/>
+        <a:font script="Syrc" typeface="Estrangelo Edessa"/>
+        <a:font script="Orya" typeface="Kalinga"/>
+        <a:font script="Mlym" typeface="Kartika"/>
+        <a:font script="Laoo" typeface="DokChampa"/>
+        <a:font script="Sinh" typeface="Iskoola Pota"/>
+        <a:font script="Mong" typeface="Mongolian Baiti"/>
+        <a:font script="Viet" typeface="Times New Roman"/>
+        <a:font script="Uigh" typeface="Microsoft Uighur"/>
+        <a:font script="Geor" typeface="Sylfaen"/>
+      </a:majorFont>
+      <a:minorFont>
+        <a:latin typeface="Calibri" panose="020F0502020204030204"/>
+        <a:ea typeface=""/>
+        <a:cs typeface=""/>
+        <a:font script="Jpan" typeface="ＭＳ Ｐゴシック"/>
+        <a:font script="Hang" typeface="맑은 고딕"/>
+        <a:font script="Hans" typeface="宋体"/>
+        <a:font script="Hant" typeface="新細明體"/>
+        <a:font script="Arab" typeface="Arial"/>
+        <a:font script="Hebr" typeface="Arial"/>
+        <a:font script="Thai" typeface="Cordia New"/>
+        <a:font script="Ethi" typeface="Nyala"/>
+        <a:font script="Beng" typeface="Vrinda"/>
+        <a:font script="Gujr" typeface="Shruti"/>
+        <a:font script="Khmr" typeface="DaunPenh"/>
+        <a:font script="Knda" typeface="Tunga"/>
+        <a:font script="Guru" typeface="Raavi"/>
+        <a:font script="Cans" typeface="Euphemia"/>
+        <a:font script="Cher" typeface="Plantagenet Cherokee"/>
+        <a:font script="Yiii" typeface="Microsoft Yi Baiti"/>
+        <a:font script="Tibt" typeface="Microsoft Himalaya"/>
+        <a:font script="Thaa" typeface="MV Boli"/>
+        <a:font script="Deva" typeface="Mangal"/>
+        <a:font script="Telu" typeface="Gautami"/>
+        <a:font script="Taml" typeface="Latha"/>
+        <a:font script="Syrc" typeface="Estrangelo Edessa"/>
+        <a:font script="Orya" typeface="Kalinga"/>
+        <a:font script="Mlym" typeface="Kartika"/>
+        <a:font script="Laoo" typeface="DokChampa"/>
+        <a:font script="Sinh" typeface="Iskoola Pota"/>
+        <a:font script="Mong" typeface="Mongolian Baiti"/>
+        <a:font script="Viet" typeface="Arial"/>
+        <a:font script="Uigh" typeface="Microsoft Uighur"/>
+        <a:font script="Geor" typeface="Sylfaen"/>
+      </a:minorFont>
+    </a:fontScheme>
+    <a:fmtScheme name="Office">
+      <a:fillStyleLst>
+        <a:solidFill>
+          <a:schemeClr val="phClr"/>
+        </a:solidFill>
+        <a:gradFill rotWithShape="1">
+          <a:gsLst>
+            <a:gs pos="0">
+              <a:schemeClr val="phClr">
+                <a:lumMod val="110000"/>
+                <a:satMod val="105000"/>
+                <a:tint val="67000"/>
+              </a:schemeClr>
+            </a:gs>
+            <a:gs pos="50000">
+              <a:schemeClr val="phClr">
+                <a:lumMod val="105000"/>
+                <a:satMod val="103000"/>
+                <a:tint val="73000"/>
+              </a:schemeClr>
+            </a:gs>
+            <a:gs pos="100000">
+              <a:schemeClr val="phClr">
+                <a:lumMod val="105000"/>
+                <a:satMod val="109000"/>
+                <a:tint val="81000"/>
+              </a:schemeClr>
+            </a:gs>
+          </a:gsLst>
+          <a:lin ang="5400000" scaled="0"/>
+        </a:gradFill>
+        <a:gradFill rotWithShape="1">
+          <a:gsLst>
+            <a:gs pos="0">
+              <a:schemeClr val="phClr">
+                <a:satMod val="103000"/>
+                <a:lumMod val="102000"/>
+                <a:tint val="94000"/>
+              </a:schemeClr>
+            </a:gs>
+            <a:gs pos="50000">
+              <a:schemeClr val="phClr">
+                <a:satMod val="110000"/>
+                <a:lumMod val="100000"/>
+                <a:shade val="100000"/>
+              </a:schemeClr>
+            </a:gs>
+            <a:gs pos="100000">
+              <a:schemeClr val="phClr">
+                <a:lumMod val="99000"/>
+                <a:satMod val="120000"/>
+                <a:shade val="78000"/>
+              </a:schemeClr>
+            </a:gs>
+          </a:gsLst>
+          <a:lin ang="5400000" scaled="0"/>
+        </a:gradFill>
+      </a:fillStyleLst>
+      <a:lnStyleLst>
+        <a:ln w="6350" cap="flat" cmpd="sng" algn="ctr">
+          <a:solidFill>
+            <a:schemeClr val="phClr"/>
+          </a:solidFill>
+          <a:prstDash val="solid"/>
+          <a:miter lim="800000"/>
+        </a:ln>
+        <a:ln w="12700" cap="flat" cmpd="sng" algn="ctr">
+          <a:solidFill>
+            <a:schemeClr val="phClr"/>
+          </a:solidFill>
+          <a:prstDash val="solid"/>
+          <a:miter lim="800000"/>
+        </a:ln>
+        <a:ln w="19050" cap="flat" cmpd="sng" algn="ctr">
+          <a:solidFill>
+            <a:schemeClr val="phClr"/>
+          </a:solidFill>
+          <a:prstDash val="solid"/>
+          <a:miter lim="800000"/>
+        </a:ln>
+      </a:lnStyleLst>
+      <a:effectStyleLst>
+        <a:effectStyle>
+          <a:effectLst/>
+        </a:effectStyle>
+        <a:effectStyle>
+          <a:effectLst/>
+        </a:effectStyle>
+        <a:effectStyle>
+          <a:effectLst>
+            <a:outerShdw blurRad="57150" dist="19050" dir="5400000" algn="ctr" rotWithShape="0">
+              <a:srgbClr val="000000">
+                <a:alpha val="63000"/>
+              </a:srgbClr>
+            </a:outerShdw>
+          </a:effectLst>
+        </a:effectStyle>
+      </a:effectStyleLst>
+      <a:bgFillStyleLst>
+        <a:solidFill>
+          <a:schemeClr val="phClr"/>
+        </a:solidFill>
+        <a:solidFill>
+          <a:schemeClr val="phClr">
+            <a:tint val="95000"/>
+            <a:satMod val="170000"/>
+          </a:schemeClr>
+        </a:solidFill>
+        <a:gradFill rotWithShape="1">
+          <a:gsLst>
+            <a:gs pos="0">
+              <a:schemeClr val="phClr">
+                <a:tint val="93000"/>
+                <a:satMod val="150000"/>
+                <a:shade val="98000"/>
+                <a:lumMod val="102000"/>
+              </a:schemeClr>
+            </a:gs>
+            <a:gs pos="50000">
+              <a:schemeClr val="phClr">
+                <a:tint val="98000"/>
+                <a:satMod val="130000"/>
+                <a:shade val="90000"/>
+                <a:lumMod val="103000"/>
+              </a:schemeClr>
+            </a:gs>
+            <a:gs pos="100000">
+              <a:schemeClr val="phClr">
+                <a:shade val="63000"/>
+                <a:satMod val="120000"/>
+              </a:schemeClr>
+            </a:gs>
+          </a:gsLst>
+          <a:lin ang="5400000" scaled="0"/>
+        </a:gradFill>
+      </a:bgFillStyleLst>
+    </a:fmtScheme>
+  </a:themeElements>
+  <a:objectDefaults/>
+  <a:extraClrSchemeLst/>
+  <a:extLst>
+    <a:ext uri="{05A4C25C-085E-4340-85A3-A5531E510DB2}">
+      <thm15:themeFamily xmlns:thm15="http://schemas.microsoft.com/office/thememl/2012/main" name="Office Theme" id="{62F939B6-93AF-4DB8-9C6B-D6C7DFDC589F}" vid="{4A3C46E8-61CC-4603-A589-7422A47A8E4A}"/>
+    </a:ext>
+  </a:extLst>
+</a:theme>
 </file>
--- a/chrono_fair/presentation/CHRONO_Fair_supervisor_meeting.pptx
+++ b/chrono_fair/presentation/CHRONO_Fair_supervisor_meeting.pptx
@@ -22,7 +22,6 @@
     <p:sldId id="270" r:id="rId16"/>
     <p:sldId id="271" r:id="rId17"/>
     <p:sldId id="272" r:id="rId18"/>
-    <p:sldId id="273" r:id="rId19"/>
   </p:sldIdLst>
   <p:sldSz cx="12192000" cy="6858000" type="screen16x9"/>
   <p:notesSz cx="6858000" cy="9144000"/>
@@ -3107,34 +3106,36 @@
           <a:chExt cx="0" cy="0"/>
         </a:xfrm>
       </p:grpSpPr>
-      <p:sp>
-        <p:nvSpPr>
-          <p:cNvPr id="3" name="Subtitle 2"/>
-          <p:cNvSpPr>
-            <a:spLocks noGrp="1"/>
-          </p:cNvSpPr>
-          <p:nvPr>
-            <p:ph idx="1" type="subTitle"/>
-          </p:nvPr>
-        </p:nvSpPr>
-        <p:spPr>
+      <p:pic>
+        <p:nvPicPr>
+          <p:cNvPr descr="slide-01.jpg" id="0" name="Picture 1"/>
+          <p:cNvPicPr>
+            <a:picLocks noGrp="1" noChangeAspect="1"/>
+          </p:cNvPicPr>
+          <p:nvPr/>
+        </p:nvPicPr>
+        <p:blipFill>
+          <a:blip r:embed="rId2"/>
+          <a:stretch>
+            <a:fillRect/>
+          </a:stretch>
+        </p:blipFill>
+        <p:spPr bwMode="auto">
           <a:xfrm>
             <a:off x="0" y="0"/>
             <a:ext cx="12192000" cy="6858000"/>
           </a:xfrm>
+          <a:prstGeom prst="rect">
+            <a:avLst/>
+          </a:prstGeom>
+          <a:noFill/>
+          <a:ln w="9525">
+            <a:noFill/>
+            <a:headEnd/>
+            <a:tailEnd/>
+          </a:ln>
         </p:spPr>
-        <p:txBody>
-          <a:bodyPr/>
-          <a:lstStyle/>
-          <a:p>
-            <a:pPr lvl="0" indent="0" marL="0">
-              <a:buNone/>
-            </a:pPr>
-            <a:br/>
-            <a:br/>
-          </a:p>
-        </p:txBody>
-      </p:sp>
+      </p:pic>
     </p:spTree>
   </p:cSld>
 </p:sld>
@@ -3159,7 +3160,7 @@
       </p:grpSpPr>
       <p:pic>
         <p:nvPicPr>
-          <p:cNvPr descr="slide-09.jpg" id="0" name="Picture 1"/>
+          <p:cNvPr descr="slide-10.jpg" id="0" name="Picture 1"/>
           <p:cNvPicPr>
             <a:picLocks noGrp="1" noChangeAspect="1"/>
           </p:cNvPicPr>
@@ -3211,7 +3212,7 @@
       </p:grpSpPr>
       <p:pic>
         <p:nvPicPr>
-          <p:cNvPr descr="slide-10.jpg" id="0" name="Picture 1"/>
+          <p:cNvPr descr="slide-11.jpg" id="0" name="Picture 1"/>
           <p:cNvPicPr>
             <a:picLocks noGrp="1" noChangeAspect="1"/>
           </p:cNvPicPr>
@@ -3263,7 +3264,7 @@
       </p:grpSpPr>
       <p:pic>
         <p:nvPicPr>
-          <p:cNvPr descr="slide-11.jpg" id="0" name="Picture 1"/>
+          <p:cNvPr descr="slide-12.jpg" id="0" name="Picture 1"/>
           <p:cNvPicPr>
             <a:picLocks noGrp="1" noChangeAspect="1"/>
           </p:cNvPicPr>
@@ -3315,7 +3316,7 @@
       </p:grpSpPr>
       <p:pic>
         <p:nvPicPr>
-          <p:cNvPr descr="slide-12.jpg" id="0" name="Picture 1"/>
+          <p:cNvPr descr="slide-13.jpg" id="0" name="Picture 1"/>
           <p:cNvPicPr>
             <a:picLocks noGrp="1" noChangeAspect="1"/>
           </p:cNvPicPr>
@@ -3367,7 +3368,7 @@
       </p:grpSpPr>
       <p:pic>
         <p:nvPicPr>
-          <p:cNvPr descr="slide-13.jpg" id="0" name="Picture 1"/>
+          <p:cNvPr descr="slide-14.jpg" id="0" name="Picture 1"/>
           <p:cNvPicPr>
             <a:picLocks noGrp="1" noChangeAspect="1"/>
           </p:cNvPicPr>
@@ -3419,7 +3420,7 @@
       </p:grpSpPr>
       <p:pic>
         <p:nvPicPr>
-          <p:cNvPr descr="slide-14.jpg" id="0" name="Picture 1"/>
+          <p:cNvPr descr="slide-15.jpg" id="0" name="Picture 1"/>
           <p:cNvPicPr>
             <a:picLocks noGrp="1" noChangeAspect="1"/>
           </p:cNvPicPr>
@@ -3471,7 +3472,7 @@
       </p:grpSpPr>
       <p:pic>
         <p:nvPicPr>
-          <p:cNvPr descr="slide-15.jpg" id="0" name="Picture 1"/>
+          <p:cNvPr descr="slide-16.jpg" id="0" name="Picture 1"/>
           <p:cNvPicPr>
             <a:picLocks noGrp="1" noChangeAspect="1"/>
           </p:cNvPicPr>
@@ -3505,58 +3506,6 @@
 </file>
 
 <file path=ppt/slides/slide17.xml><?xml version="1.0" encoding="utf-8"?>
-<p:sld xmlns:a="http://schemas.openxmlformats.org/drawingml/2006/main" xmlns:r="http://schemas.openxmlformats.org/officeDocument/2006/relationships" xmlns:p="http://schemas.openxmlformats.org/presentationml/2006/main">
-  <p:cSld>
-    <p:spTree>
-      <p:nvGrpSpPr>
-        <p:cNvPr id="1" name=""/>
-        <p:cNvGrpSpPr/>
-        <p:nvPr/>
-      </p:nvGrpSpPr>
-      <p:grpSpPr>
-        <a:xfrm>
-          <a:off x="0" y="0"/>
-          <a:ext cx="0" cy="0"/>
-          <a:chOff x="0" y="0"/>
-          <a:chExt cx="0" cy="0"/>
-        </a:xfrm>
-      </p:grpSpPr>
-      <p:pic>
-        <p:nvPicPr>
-          <p:cNvPr descr="slide-16.jpg" id="0" name="Picture 1"/>
-          <p:cNvPicPr>
-            <a:picLocks noGrp="1" noChangeAspect="1"/>
-          </p:cNvPicPr>
-          <p:nvPr/>
-        </p:nvPicPr>
-        <p:blipFill>
-          <a:blip r:embed="rId2"/>
-          <a:stretch>
-            <a:fillRect/>
-          </a:stretch>
-        </p:blipFill>
-        <p:spPr bwMode="auto">
-          <a:xfrm>
-            <a:off x="0" y="0"/>
-            <a:ext cx="12192000" cy="6858000"/>
-          </a:xfrm>
-          <a:prstGeom prst="rect">
-            <a:avLst/>
-          </a:prstGeom>
-          <a:noFill/>
-          <a:ln w="9525">
-            <a:noFill/>
-            <a:headEnd/>
-            <a:tailEnd/>
-          </a:ln>
-        </p:spPr>
-      </p:pic>
-    </p:spTree>
-  </p:cSld>
-</p:sld>
-</file>
-
-<file path=ppt/slides/slide18.xml><?xml version="1.0" encoding="utf-8"?>
 <p:sld xmlns:a="http://schemas.openxmlformats.org/drawingml/2006/main" xmlns:r="http://schemas.openxmlformats.org/officeDocument/2006/relationships" xmlns:p="http://schemas.openxmlformats.org/presentationml/2006/main">
   <p:cSld>
     <p:spTree>
@@ -3627,7 +3576,7 @@
       </p:grpSpPr>
       <p:pic>
         <p:nvPicPr>
-          <p:cNvPr descr="slide-01.jpg" id="0" name="Picture 1"/>
+          <p:cNvPr descr="slide-02.jpg" id="0" name="Picture 1"/>
           <p:cNvPicPr>
             <a:picLocks noGrp="1" noChangeAspect="1"/>
           </p:cNvPicPr>
@@ -3679,7 +3628,7 @@
       </p:grpSpPr>
       <p:pic>
         <p:nvPicPr>
-          <p:cNvPr descr="slide-02.jpg" id="0" name="Picture 1"/>
+          <p:cNvPr descr="slide-03.jpg" id="0" name="Picture 1"/>
           <p:cNvPicPr>
             <a:picLocks noGrp="1" noChangeAspect="1"/>
           </p:cNvPicPr>
@@ -3731,7 +3680,7 @@
       </p:grpSpPr>
       <p:pic>
         <p:nvPicPr>
-          <p:cNvPr descr="slide-03.jpg" id="0" name="Picture 1"/>
+          <p:cNvPr descr="slide-04.jpg" id="0" name="Picture 1"/>
           <p:cNvPicPr>
             <a:picLocks noGrp="1" noChangeAspect="1"/>
           </p:cNvPicPr>
@@ -3783,7 +3732,7 @@
       </p:grpSpPr>
       <p:pic>
         <p:nvPicPr>
-          <p:cNvPr descr="slide-04.jpg" id="0" name="Picture 1"/>
+          <p:cNvPr descr="slide-05.jpg" id="0" name="Picture 1"/>
           <p:cNvPicPr>
             <a:picLocks noGrp="1" noChangeAspect="1"/>
           </p:cNvPicPr>
@@ -3835,7 +3784,7 @@
       </p:grpSpPr>
       <p:pic>
         <p:nvPicPr>
-          <p:cNvPr descr="slide-05.jpg" id="0" name="Picture 1"/>
+          <p:cNvPr descr="slide-06.jpg" id="0" name="Picture 1"/>
           <p:cNvPicPr>
             <a:picLocks noGrp="1" noChangeAspect="1"/>
           </p:cNvPicPr>
@@ -3887,7 +3836,7 @@
       </p:grpSpPr>
       <p:pic>
         <p:nvPicPr>
-          <p:cNvPr descr="slide-06.jpg" id="0" name="Picture 1"/>
+          <p:cNvPr descr="slide-07.jpg" id="0" name="Picture 1"/>
           <p:cNvPicPr>
             <a:picLocks noGrp="1" noChangeAspect="1"/>
           </p:cNvPicPr>
@@ -3939,7 +3888,7 @@
       </p:grpSpPr>
       <p:pic>
         <p:nvPicPr>
-          <p:cNvPr descr="slide-07.jpg" id="0" name="Picture 1"/>
+          <p:cNvPr descr="slide-08.jpg" id="0" name="Picture 1"/>
           <p:cNvPicPr>
             <a:picLocks noGrp="1" noChangeAspect="1"/>
           </p:cNvPicPr>
@@ -3991,7 +3940,7 @@
       </p:grpSpPr>
       <p:pic>
         <p:nvPicPr>
-          <p:cNvPr descr="slide-08.jpg" id="0" name="Picture 1"/>
+          <p:cNvPr descr="slide-09.jpg" id="0" name="Picture 1"/>
           <p:cNvPicPr>
             <a:picLocks noGrp="1" noChangeAspect="1"/>
           </p:cNvPicPr>
